--- a/virtual_human_course/Module_2/Chapter_02/Slides/Module_2_Chapter_02_Building_Stateful_Agents_with_Memory.pptx
+++ b/virtual_human_course/Module_2/Chapter_02/Slides/Module_2_Chapter_02_Building_Stateful_Agents_with_Memory.pptx
@@ -2,24 +2,24 @@
 <file path=ppt/presentation.xml><?xml version="1.0" encoding="utf-8"?>
 <ns0:presentation xmlns:ns0="http://schemas.openxmlformats.org/presentationml/2006/main" xmlns:ns1="http://schemas.openxmlformats.org/officeDocument/2006/relationships">
   <ns0:sldMasterIdLst>
-    <ns0:sldMasterId id="2147483648" ns1:id="R794a1641e8154aa5"/>
+    <ns0:sldMasterId id="2147483648" ns1:id="R4f4a3ca48d8e40cc"/>
   </ns0:sldMasterIdLst>
   <ns0:sldIdLst>
-    <ns0:sldId id="256" ns1:id="Rca29573a13044157"/>
-    <ns0:sldId id="257" ns1:id="Ra4f6c2bbe56247c1"/>
-    <ns0:sldId id="258" ns1:id="R8cd364cfb34d4eeb"/>
-    <ns0:sldId id="259" ns1:id="Rd90cce029fb94b54"/>
-    <ns0:sldId id="260" ns1:id="Re342cb066bb24b3b"/>
-    <ns0:sldId id="261" ns1:id="Rca3b159a712f4737"/>
-    <ns0:sldId id="262" ns1:id="R22387af9356148e8"/>
-    <ns0:sldId id="263" ns1:id="R556a273645174599"/>
-    <ns0:sldId id="264" ns1:id="R9a4a07f8062f4b4b"/>
-    <ns0:sldId id="265" ns1:id="R102ab76bad3042ca"/>
-    <ns0:sldId id="266" ns1:id="Rf4dc3155e7624527"/>
-    <ns0:sldId id="267" ns1:id="Rff37ec419ca1429f"/>
-    <ns0:sldId id="268" ns1:id="Re0bde352651b4469"/>
-    <ns0:sldId id="269" ns1:id="R00c943169d5048ef"/>
-    <ns0:sldId id="270" ns1:id="R87641764226e4d16"/>
+    <ns0:sldId id="256" ns1:id="R799db1775fd746a0"/>
+    <ns0:sldId id="257" ns1:id="Ra6a34de89b8c4849"/>
+    <ns0:sldId id="258" ns1:id="R32104bb8c86f48e1"/>
+    <ns0:sldId id="259" ns1:id="Ref957af8cafa44e6"/>
+    <ns0:sldId id="260" ns1:id="Ra42201a3c25642ea"/>
+    <ns0:sldId id="261" ns1:id="R2b176911594c41be"/>
+    <ns0:sldId id="262" ns1:id="R09a45a742c4b4db6"/>
+    <ns0:sldId id="263" ns1:id="R37a104aaf6504009"/>
+    <ns0:sldId id="264" ns1:id="R468e0f1e0375438a"/>
+    <ns0:sldId id="265" ns1:id="R63d8930d9cf84563"/>
+    <ns0:sldId id="266" ns1:id="R39e7ce8280144a99"/>
+    <ns0:sldId id="267" ns1:id="R091b29a6930b4138"/>
+    <ns0:sldId id="268" ns1:id="Rbf9f86f585494506"/>
+    <ns0:sldId id="269" ns1:id="R13d462ca680b4243"/>
+    <ns0:sldId id="270" ns1:id="Rcdd3331c31334b0b"/>
   </ns0:sldIdLst>
   <ns0:sldSz cx="9144000" cy="5143500"/>
   <ns0:notesSz cx="6858000" cy="9144000"/>
@@ -76,7 +76,7 @@
           <p:nvPr/>
         </p:nvPicPr>
         <p:blipFill>
-          <a:blip xmlns:r="http://schemas.openxmlformats.org/officeDocument/2006/relationships" xmlns:a="http://schemas.openxmlformats.org/drawingml/2006/main" r:embed="R92cc9dc9d71c468a"/>
+          <a:blip xmlns:r="http://schemas.openxmlformats.org/officeDocument/2006/relationships" xmlns:a="http://schemas.openxmlformats.org/drawingml/2006/main" r:embed="R216f713981d4495e"/>
           <a:srcRect xmlns:a="http://schemas.openxmlformats.org/drawingml/2006/main" l="0" t="0" r="0" b="0"/>
           <a:stretch xmlns:a="http://schemas.openxmlformats.org/drawingml/2006/main"/>
         </p:blipFill>
@@ -221,7 +221,7 @@
           <p:nvPr/>
         </p:nvPicPr>
         <p:blipFill>
-          <a:blip xmlns:r="http://schemas.openxmlformats.org/officeDocument/2006/relationships" xmlns:a="http://schemas.openxmlformats.org/drawingml/2006/main" r:embed="Rb6a93b82594b44dc"/>
+          <a:blip xmlns:r="http://schemas.openxmlformats.org/officeDocument/2006/relationships" xmlns:a="http://schemas.openxmlformats.org/drawingml/2006/main" r:embed="Ra820785a13ba4cde"/>
           <a:srcRect xmlns:a="http://schemas.openxmlformats.org/drawingml/2006/main" l="0" t="0" r="0" b="0"/>
           <a:stretch xmlns:a="http://schemas.openxmlformats.org/drawingml/2006/main"/>
         </p:blipFill>
@@ -1158,14 +1158,14 @@
   </p:cSld>
   <p:clrMap bg1="lt1" tx1="dk1" bg2="lt2" tx2="dk2" accent1="accent1" accent2="accent2" accent3="accent3" accent4="accent4" accent5="accent5" accent6="accent6" hlink="hlink" folHlink="folHlink"/>
   <p:sldLayoutIdLst>
-    <p:sldLayoutId xmlns:r="http://schemas.openxmlformats.org/officeDocument/2006/relationships" id="2147483649" r:id="R331b98e442f44969"/>
-    <p:sldLayoutId xmlns:r="http://schemas.openxmlformats.org/officeDocument/2006/relationships" id="2147483650" r:id="R03fbb5b28de3456f"/>
-    <p:sldLayoutId xmlns:r="http://schemas.openxmlformats.org/officeDocument/2006/relationships" id="2147483651" r:id="R4902234adb3d498c"/>
-    <p:sldLayoutId xmlns:r="http://schemas.openxmlformats.org/officeDocument/2006/relationships" id="2147483652" r:id="Rd2df8f307adf4e94"/>
-    <p:sldLayoutId xmlns:r="http://schemas.openxmlformats.org/officeDocument/2006/relationships" id="2147483653" r:id="R6f854a2695f241da"/>
-    <p:sldLayoutId xmlns:r="http://schemas.openxmlformats.org/officeDocument/2006/relationships" id="2147483654" r:id="Rac17148331634aa3"/>
-    <p:sldLayoutId xmlns:r="http://schemas.openxmlformats.org/officeDocument/2006/relationships" id="2147483655" r:id="Re3933e1287d54462"/>
-    <p:sldLayoutId xmlns:r="http://schemas.openxmlformats.org/officeDocument/2006/relationships" id="2147483656" r:id="R6aa43a466d964008"/>
+    <p:sldLayoutId xmlns:r="http://schemas.openxmlformats.org/officeDocument/2006/relationships" id="2147483649" r:id="R6cfcd0475f9c46df"/>
+    <p:sldLayoutId xmlns:r="http://schemas.openxmlformats.org/officeDocument/2006/relationships" id="2147483650" r:id="R78a6a1bcc7314cf1"/>
+    <p:sldLayoutId xmlns:r="http://schemas.openxmlformats.org/officeDocument/2006/relationships" id="2147483651" r:id="R061c5eac682d402e"/>
+    <p:sldLayoutId xmlns:r="http://schemas.openxmlformats.org/officeDocument/2006/relationships" id="2147483652" r:id="R1cd547d1e52d43c6"/>
+    <p:sldLayoutId xmlns:r="http://schemas.openxmlformats.org/officeDocument/2006/relationships" id="2147483653" r:id="R0402fb6899fb4573"/>
+    <p:sldLayoutId xmlns:r="http://schemas.openxmlformats.org/officeDocument/2006/relationships" id="2147483654" r:id="R0c201ade50514214"/>
+    <p:sldLayoutId xmlns:r="http://schemas.openxmlformats.org/officeDocument/2006/relationships" id="2147483655" r:id="Rf58500658e824c42"/>
+    <p:sldLayoutId xmlns:r="http://schemas.openxmlformats.org/officeDocument/2006/relationships" id="2147483656" r:id="R79df11ad49c5491a"/>
   </p:sldLayoutIdLst>
   <p:hf sldNum="0" hdr="0" ftr="0" dt="0"/>
   <p:txStyles>
@@ -1831,7 +1831,7 @@
           <p:nvPr/>
         </p:nvPicPr>
         <p:blipFill>
-          <a:blip xmlns:r="http://schemas.openxmlformats.org/officeDocument/2006/relationships" xmlns:a="http://schemas.openxmlformats.org/drawingml/2006/main" r:embed="R6dd10e0f880c45a6"/>
+          <a:blip xmlns:r="http://schemas.openxmlformats.org/officeDocument/2006/relationships" xmlns:a="http://schemas.openxmlformats.org/drawingml/2006/main" r:embed="R5f2b74ebcb714294"/>
           <a:srcRect xmlns:a="http://schemas.openxmlformats.org/drawingml/2006/main" l="0" t="27" r="0" b="27"/>
           <a:stretch xmlns:a="http://schemas.openxmlformats.org/drawingml/2006/main">
             <a:fillRect l="0" t="0" r="0" b="0"/>
@@ -2630,7 +2630,7 @@
           <p:cNvPr id="53" name="c3-text-151">
             <a:extLst xmlns:a="http://schemas.openxmlformats.org/drawingml/2006/main">
               <a:ext uri="{FF2B5EF4-FFF2-40B4-BE49-F238E27FC236}">
-                <a16:creationId xmlns:a16="http://schemas.microsoft.com/office/drawing/2014/main" id="{97E82599-7F9D-4639-96B5-FF55C39F9BDE}"/>
+                <a16:creationId xmlns:a16="http://schemas.microsoft.com/office/drawing/2014/main" id="{5A0EACA3-105F-4123-815D-037825643E08}"/>
               </a:ext>
             </a:extLst>
           </p:cNvPr>
@@ -2716,7 +2716,7 @@
           <p:cNvPr id="15" name="c3-text-88">
             <a:extLst xmlns:a="http://schemas.openxmlformats.org/drawingml/2006/main">
               <a:ext uri="{FF2B5EF4-FFF2-40B4-BE49-F238E27FC236}">
-                <a16:creationId xmlns:a16="http://schemas.microsoft.com/office/drawing/2014/main" id="{A7A7C83E-100B-4A57-BC33-D96DE16AA9D0}"/>
+                <a16:creationId xmlns:a16="http://schemas.microsoft.com/office/drawing/2014/main" id="{CFB1845F-C005-47E2-BEB9-35F3AE48433B}"/>
               </a:ext>
             </a:extLst>
           </p:cNvPr>
@@ -2773,7 +2773,7 @@
           <p:cNvPr id="2" name="c3-text-89">
             <a:extLst xmlns:a="http://schemas.openxmlformats.org/drawingml/2006/main">
               <a:ext uri="{FF2B5EF4-FFF2-40B4-BE49-F238E27FC236}">
-                <a16:creationId xmlns:a16="http://schemas.microsoft.com/office/drawing/2014/main" id="{0ACC1D83-6F60-4D13-BB5A-AF533E152510}"/>
+                <a16:creationId xmlns:a16="http://schemas.microsoft.com/office/drawing/2014/main" id="{55FE277C-2045-4789-947F-21761C3807D8}"/>
               </a:ext>
             </a:extLst>
           </p:cNvPr>
@@ -2830,7 +2830,7 @@
           <p:cNvPr id="3" name="c3-text-90">
             <a:extLst xmlns:a="http://schemas.openxmlformats.org/drawingml/2006/main">
               <a:ext uri="{FF2B5EF4-FFF2-40B4-BE49-F238E27FC236}">
-                <a16:creationId xmlns:a16="http://schemas.microsoft.com/office/drawing/2014/main" id="{311CD059-F91C-4537-ACC5-C55639C0F963}"/>
+                <a16:creationId xmlns:a16="http://schemas.microsoft.com/office/drawing/2014/main" id="{6A59035F-A53A-49C7-A31F-C8CF1C370C42}"/>
               </a:ext>
             </a:extLst>
           </p:cNvPr>
@@ -2887,7 +2887,7 @@
           <p:cNvPr id="4" name="c3-shape-91">
             <a:extLst xmlns:a="http://schemas.openxmlformats.org/drawingml/2006/main">
               <a:ext uri="{FF2B5EF4-FFF2-40B4-BE49-F238E27FC236}">
-                <a16:creationId xmlns:a16="http://schemas.microsoft.com/office/drawing/2014/main" id="{76B5A73F-13BB-4DB2-8C4A-4EACD45F6729}"/>
+                <a16:creationId xmlns:a16="http://schemas.microsoft.com/office/drawing/2014/main" id="{4736BDCC-4A22-45BF-AC11-0EEA094AC95A}"/>
               </a:ext>
             </a:extLst>
           </p:cNvPr>
@@ -2921,7 +2921,7 @@
           <p:cNvPr id="5" name="c3-shape-92">
             <a:extLst xmlns:a="http://schemas.openxmlformats.org/drawingml/2006/main">
               <a:ext uri="{FF2B5EF4-FFF2-40B4-BE49-F238E27FC236}">
-                <a16:creationId xmlns:a16="http://schemas.microsoft.com/office/drawing/2014/main" id="{E266EF8E-E284-4B1A-A6F9-9AE9E976F317}"/>
+                <a16:creationId xmlns:a16="http://schemas.microsoft.com/office/drawing/2014/main" id="{58CC7582-1E8C-4F27-8D4D-361E38CD970C}"/>
               </a:ext>
             </a:extLst>
           </p:cNvPr>
@@ -2953,7 +2953,7 @@
           <p:cNvPr id="6" name="c3-text-93">
             <a:extLst xmlns:a="http://schemas.openxmlformats.org/drawingml/2006/main">
               <a:ext uri="{FF2B5EF4-FFF2-40B4-BE49-F238E27FC236}">
-                <a16:creationId xmlns:a16="http://schemas.microsoft.com/office/drawing/2014/main" id="{BC10B66A-FDCF-4388-84D0-5A3908968B66}"/>
+                <a16:creationId xmlns:a16="http://schemas.microsoft.com/office/drawing/2014/main" id="{8762E54C-E214-4CBE-B79E-D13ACA4FC58F}"/>
               </a:ext>
             </a:extLst>
           </p:cNvPr>
@@ -3010,7 +3010,7 @@
           <p:cNvPr id="7" name="c3-text-94">
             <a:extLst xmlns:a="http://schemas.openxmlformats.org/drawingml/2006/main">
               <a:ext uri="{FF2B5EF4-FFF2-40B4-BE49-F238E27FC236}">
-                <a16:creationId xmlns:a16="http://schemas.microsoft.com/office/drawing/2014/main" id="{7A45E9D2-44D9-4115-A3F7-5165DA2F5617}"/>
+                <a16:creationId xmlns:a16="http://schemas.microsoft.com/office/drawing/2014/main" id="{CF1164BC-BE57-4BF6-8F56-35F0A8C54903}"/>
               </a:ext>
             </a:extLst>
           </p:cNvPr>
@@ -3090,7 +3090,7 @@
           <p:cNvPr id="8" name="c3-shape-95">
             <a:extLst xmlns:a="http://schemas.openxmlformats.org/drawingml/2006/main">
               <a:ext uri="{FF2B5EF4-FFF2-40B4-BE49-F238E27FC236}">
-                <a16:creationId xmlns:a16="http://schemas.microsoft.com/office/drawing/2014/main" id="{ED565458-0406-47AC-AE13-65413151461C}"/>
+                <a16:creationId xmlns:a16="http://schemas.microsoft.com/office/drawing/2014/main" id="{4DE93EE6-80D3-4E2C-B3DB-C93C6BC449C9}"/>
               </a:ext>
             </a:extLst>
           </p:cNvPr>
@@ -3124,7 +3124,7 @@
           <p:cNvPr id="9" name="c3-shape-96">
             <a:extLst xmlns:a="http://schemas.openxmlformats.org/drawingml/2006/main">
               <a:ext uri="{FF2B5EF4-FFF2-40B4-BE49-F238E27FC236}">
-                <a16:creationId xmlns:a16="http://schemas.microsoft.com/office/drawing/2014/main" id="{A8F1397E-5C99-4F09-956A-1F088AAEE8DB}"/>
+                <a16:creationId xmlns:a16="http://schemas.microsoft.com/office/drawing/2014/main" id="{2FBD1169-E3DD-4090-B8A3-8BB2B9790F52}"/>
               </a:ext>
             </a:extLst>
           </p:cNvPr>
@@ -3156,7 +3156,7 @@
           <p:cNvPr id="10" name="c3-text-97">
             <a:extLst xmlns:a="http://schemas.openxmlformats.org/drawingml/2006/main">
               <a:ext uri="{FF2B5EF4-FFF2-40B4-BE49-F238E27FC236}">
-                <a16:creationId xmlns:a16="http://schemas.microsoft.com/office/drawing/2014/main" id="{0C178E7E-0736-42E0-B1AE-B6BA8A095C94}"/>
+                <a16:creationId xmlns:a16="http://schemas.microsoft.com/office/drawing/2014/main" id="{4C30BFD9-8397-4C33-804C-013DB667B9F6}"/>
               </a:ext>
             </a:extLst>
           </p:cNvPr>
@@ -3213,7 +3213,7 @@
           <p:cNvPr id="11" name="c3-text-98">
             <a:extLst xmlns:a="http://schemas.openxmlformats.org/drawingml/2006/main">
               <a:ext uri="{FF2B5EF4-FFF2-40B4-BE49-F238E27FC236}">
-                <a16:creationId xmlns:a16="http://schemas.microsoft.com/office/drawing/2014/main" id="{AF5E7B4B-B267-4D65-A688-0F68B6CFEB52}"/>
+                <a16:creationId xmlns:a16="http://schemas.microsoft.com/office/drawing/2014/main" id="{F5EFCCEB-DFF7-4E83-9B1F-E5479D568AFA}"/>
               </a:ext>
             </a:extLst>
           </p:cNvPr>
@@ -3293,7 +3293,7 @@
           <p:cNvPr id="12" name="c3-shape-99">
             <a:extLst xmlns:a="http://schemas.openxmlformats.org/drawingml/2006/main">
               <a:ext uri="{FF2B5EF4-FFF2-40B4-BE49-F238E27FC236}">
-                <a16:creationId xmlns:a16="http://schemas.microsoft.com/office/drawing/2014/main" id="{4BC9F715-810A-4FD1-ABF5-FFAB9F4088A0}"/>
+                <a16:creationId xmlns:a16="http://schemas.microsoft.com/office/drawing/2014/main" id="{5FD69F8C-5B54-4BE7-85AC-33909FBB8A33}"/>
               </a:ext>
             </a:extLst>
           </p:cNvPr>
@@ -3327,7 +3327,7 @@
           <p:cNvPr id="13" name="c3-text-100">
             <a:extLst xmlns:a="http://schemas.openxmlformats.org/drawingml/2006/main">
               <a:ext uri="{FF2B5EF4-FFF2-40B4-BE49-F238E27FC236}">
-                <a16:creationId xmlns:a16="http://schemas.microsoft.com/office/drawing/2014/main" id="{60A3BA51-0A0F-4004-A305-0765C5B95986}"/>
+                <a16:creationId xmlns:a16="http://schemas.microsoft.com/office/drawing/2014/main" id="{5C6CA74E-4895-4416-B4D1-0AB9ED6DC906}"/>
               </a:ext>
             </a:extLst>
           </p:cNvPr>
@@ -3384,7 +3384,7 @@
           <p:cNvPr id="14" name="c3-text-160">
             <a:extLst xmlns:a="http://schemas.openxmlformats.org/drawingml/2006/main">
               <a:ext uri="{FF2B5EF4-FFF2-40B4-BE49-F238E27FC236}">
-                <a16:creationId xmlns:a16="http://schemas.microsoft.com/office/drawing/2014/main" id="{F3553DA8-8FF9-43D7-AE14-8424FD57292D}"/>
+                <a16:creationId xmlns:a16="http://schemas.microsoft.com/office/drawing/2014/main" id="{5B298CF0-BD03-4273-AB9E-580B3B7AE33E}"/>
               </a:ext>
             </a:extLst>
           </p:cNvPr>
@@ -3439,7 +3439,7 @@
     </p:spTree>
     <p:extLst>
       <p:ext uri="{BB962C8B-B14F-4D97-AF65-F5344CB8AC3E}">
-        <p14:creationId xmlns:p14="http://schemas.microsoft.com/office/powerpoint/2010/main" val="1106004356"/>
+        <p14:creationId xmlns:p14="http://schemas.microsoft.com/office/powerpoint/2010/main" val="1266405079"/>
       </p:ext>
     </p:extLst>
   </p:cSld>
@@ -3470,7 +3470,7 @@
           <p:cNvPr id="8" name="c3-text-101">
             <a:extLst xmlns:a="http://schemas.openxmlformats.org/drawingml/2006/main">
               <a:ext uri="{FF2B5EF4-FFF2-40B4-BE49-F238E27FC236}">
-                <a16:creationId xmlns:a16="http://schemas.microsoft.com/office/drawing/2014/main" id="{A0DEFA3B-8330-49BC-AA0D-5DD0A77DB587}"/>
+                <a16:creationId xmlns:a16="http://schemas.microsoft.com/office/drawing/2014/main" id="{6EE3867E-2420-4FD2-8F76-621DC22C6079}"/>
               </a:ext>
             </a:extLst>
           </p:cNvPr>
@@ -3527,7 +3527,7 @@
           <p:cNvPr id="2" name="c3-text-102">
             <a:extLst xmlns:a="http://schemas.openxmlformats.org/drawingml/2006/main">
               <a:ext uri="{FF2B5EF4-FFF2-40B4-BE49-F238E27FC236}">
-                <a16:creationId xmlns:a16="http://schemas.microsoft.com/office/drawing/2014/main" id="{8BD4B3F2-7CE2-47EE-942D-3A438877DF5F}"/>
+                <a16:creationId xmlns:a16="http://schemas.microsoft.com/office/drawing/2014/main" id="{14B3D15D-A5C2-42DA-AACF-94DF0C4045F0}"/>
               </a:ext>
             </a:extLst>
           </p:cNvPr>
@@ -3584,7 +3584,7 @@
           <p:cNvPr id="3" name="c3-text-103">
             <a:extLst xmlns:a="http://schemas.openxmlformats.org/drawingml/2006/main">
               <a:ext uri="{FF2B5EF4-FFF2-40B4-BE49-F238E27FC236}">
-                <a16:creationId xmlns:a16="http://schemas.microsoft.com/office/drawing/2014/main" id="{1CA32922-397A-4816-810A-18803CF8E7DE}"/>
+                <a16:creationId xmlns:a16="http://schemas.microsoft.com/office/drawing/2014/main" id="{1DC70497-915E-443E-ACCD-AC35A544AB56}"/>
               </a:ext>
             </a:extLst>
           </p:cNvPr>
@@ -3641,7 +3641,7 @@
           <p:cNvPr id="4" name="c3-shape-104">
             <a:extLst xmlns:a="http://schemas.openxmlformats.org/drawingml/2006/main">
               <a:ext uri="{FF2B5EF4-FFF2-40B4-BE49-F238E27FC236}">
-                <a16:creationId xmlns:a16="http://schemas.microsoft.com/office/drawing/2014/main" id="{F84B98F4-B813-48DA-9908-FE73C8B34D7E}"/>
+                <a16:creationId xmlns:a16="http://schemas.microsoft.com/office/drawing/2014/main" id="{8D59C33E-1448-4CC8-BD14-1BE6B23F6E1B}"/>
               </a:ext>
             </a:extLst>
           </p:cNvPr>
@@ -3675,7 +3675,7 @@
           <p:cNvPr id="5" name="c3-text-105">
             <a:extLst xmlns:a="http://schemas.openxmlformats.org/drawingml/2006/main">
               <a:ext uri="{FF2B5EF4-FFF2-40B4-BE49-F238E27FC236}">
-                <a16:creationId xmlns:a16="http://schemas.microsoft.com/office/drawing/2014/main" id="{9F5E8383-85AF-48AE-A8BC-36B2534269F1}"/>
+                <a16:creationId xmlns:a16="http://schemas.microsoft.com/office/drawing/2014/main" id="{5E2B2F2C-D6B1-443A-B65F-EB47A97498DF}"/>
               </a:ext>
             </a:extLst>
           </p:cNvPr>
@@ -3994,7 +3994,7 @@
           <p:cNvPr id="6" name="c3-text-106">
             <a:extLst xmlns:a="http://schemas.openxmlformats.org/drawingml/2006/main">
               <a:ext uri="{FF2B5EF4-FFF2-40B4-BE49-F238E27FC236}">
-                <a16:creationId xmlns:a16="http://schemas.microsoft.com/office/drawing/2014/main" id="{04010B5A-2A79-4DC9-B2E8-B495C14D1A54}"/>
+                <a16:creationId xmlns:a16="http://schemas.microsoft.com/office/drawing/2014/main" id="{3B7494E9-DCDC-4F6F-A1BA-98A41CD958BC}"/>
               </a:ext>
             </a:extLst>
           </p:cNvPr>
@@ -4051,7 +4051,7 @@
           <p:cNvPr id="7" name="c3-text-161">
             <a:extLst xmlns:a="http://schemas.openxmlformats.org/drawingml/2006/main">
               <a:ext uri="{FF2B5EF4-FFF2-40B4-BE49-F238E27FC236}">
-                <a16:creationId xmlns:a16="http://schemas.microsoft.com/office/drawing/2014/main" id="{D8EBD01B-D361-4546-BB2F-D91ED1956284}"/>
+                <a16:creationId xmlns:a16="http://schemas.microsoft.com/office/drawing/2014/main" id="{FA186536-43F6-4916-97D4-818CF9344563}"/>
               </a:ext>
             </a:extLst>
           </p:cNvPr>
@@ -4106,7 +4106,7 @@
     </p:spTree>
     <p:extLst>
       <p:ext uri="{BB962C8B-B14F-4D97-AF65-F5344CB8AC3E}">
-        <p14:creationId xmlns:p14="http://schemas.microsoft.com/office/powerpoint/2010/main" val="702678727"/>
+        <p14:creationId xmlns:p14="http://schemas.microsoft.com/office/powerpoint/2010/main" val="343692872"/>
       </p:ext>
     </p:extLst>
   </p:cSld>
@@ -4137,7 +4137,7 @@
           <p:cNvPr id="9" name="c3-text-107">
             <a:extLst xmlns:a="http://schemas.openxmlformats.org/drawingml/2006/main">
               <a:ext uri="{FF2B5EF4-FFF2-40B4-BE49-F238E27FC236}">
-                <a16:creationId xmlns:a16="http://schemas.microsoft.com/office/drawing/2014/main" id="{F7E53E2B-6729-4AF9-8842-C97070CC0829}"/>
+                <a16:creationId xmlns:a16="http://schemas.microsoft.com/office/drawing/2014/main" id="{330BB5A7-8E23-49F5-AFB8-E3DA94F3E6DB}"/>
               </a:ext>
             </a:extLst>
           </p:cNvPr>
@@ -4194,7 +4194,7 @@
           <p:cNvPr id="2" name="c3-text-108">
             <a:extLst xmlns:a="http://schemas.openxmlformats.org/drawingml/2006/main">
               <a:ext uri="{FF2B5EF4-FFF2-40B4-BE49-F238E27FC236}">
-                <a16:creationId xmlns:a16="http://schemas.microsoft.com/office/drawing/2014/main" id="{D98A1DDD-4212-4B85-BC18-473BBD12C65B}"/>
+                <a16:creationId xmlns:a16="http://schemas.microsoft.com/office/drawing/2014/main" id="{6F1E1395-A192-4F78-A250-BA994C5438C2}"/>
               </a:ext>
             </a:extLst>
           </p:cNvPr>
@@ -4251,7 +4251,7 @@
           <p:cNvPr id="3" name="c3-text-109">
             <a:extLst xmlns:a="http://schemas.openxmlformats.org/drawingml/2006/main">
               <a:ext uri="{FF2B5EF4-FFF2-40B4-BE49-F238E27FC236}">
-                <a16:creationId xmlns:a16="http://schemas.microsoft.com/office/drawing/2014/main" id="{AC0D0BAD-AE36-4D30-96CC-C0F28AF3D468}"/>
+                <a16:creationId xmlns:a16="http://schemas.microsoft.com/office/drawing/2014/main" id="{86F253A8-3183-4D98-AC12-858090221ED6}"/>
               </a:ext>
             </a:extLst>
           </p:cNvPr>
@@ -4308,7 +4308,7 @@
           <p:cNvPr id="4" name="c3-shape-110">
             <a:extLst xmlns:a="http://schemas.openxmlformats.org/drawingml/2006/main">
               <a:ext uri="{FF2B5EF4-FFF2-40B4-BE49-F238E27FC236}">
-                <a16:creationId xmlns:a16="http://schemas.microsoft.com/office/drawing/2014/main" id="{BC307A33-43EB-4877-95A7-5479541309AB}"/>
+                <a16:creationId xmlns:a16="http://schemas.microsoft.com/office/drawing/2014/main" id="{2DA63E3D-785E-4E57-B920-3A2903EA8AB5}"/>
               </a:ext>
             </a:extLst>
           </p:cNvPr>
@@ -4342,7 +4342,7 @@
           <p:cNvPr id="5" name="c3-text-111">
             <a:extLst xmlns:a="http://schemas.openxmlformats.org/drawingml/2006/main">
               <a:ext uri="{FF2B5EF4-FFF2-40B4-BE49-F238E27FC236}">
-                <a16:creationId xmlns:a16="http://schemas.microsoft.com/office/drawing/2014/main" id="{C56BB6E3-8090-49B3-945D-BAC2FF596A3F}"/>
+                <a16:creationId xmlns:a16="http://schemas.microsoft.com/office/drawing/2014/main" id="{323C6980-2468-4963-82AB-8B460BF6C31E}"/>
               </a:ext>
             </a:extLst>
           </p:cNvPr>
@@ -4584,7 +4584,29 @@
                 <a:ea typeface="Consolas"/>
                 <a:cs typeface="Consolas"/>
               </a:rPr>
-              <a:t>([system] + recent)</a:t>
+              <a:t>(prompt.</a:t>
+            </a:r>
+            <a:r>
+              <a:rPr sz="1500" b="0">
+                <a:solidFill>
+                  <a:srgbClr val="82AAFF"/>
+                </a:solidFill>
+                <a:latin typeface="Consolas"/>
+                <a:ea typeface="Consolas"/>
+                <a:cs typeface="Consolas"/>
+              </a:rPr>
+              <a:t>format_messages</a:t>
+            </a:r>
+            <a:r>
+              <a:rPr sz="1500" b="0">
+                <a:solidFill>
+                  <a:srgbClr val="BAC9DD"/>
+                </a:solidFill>
+                <a:latin typeface="Consolas"/>
+                <a:ea typeface="Consolas"/>
+                <a:cs typeface="Consolas"/>
+              </a:rPr>
+              <a:t>(messages=recent))</a:t>
             </a:r>
           </a:p>
           <a:p xmlns:a="http://schemas.openxmlformats.org/drawingml/2006/main">
@@ -4661,7 +4683,7 @@
           <p:cNvPr id="6" name="c3-shape-112">
             <a:extLst xmlns:a="http://schemas.openxmlformats.org/drawingml/2006/main">
               <a:ext uri="{FF2B5EF4-FFF2-40B4-BE49-F238E27FC236}">
-                <a16:creationId xmlns:a16="http://schemas.microsoft.com/office/drawing/2014/main" id="{B3F82C01-5A15-40FA-92AE-22DEC644A072}"/>
+                <a16:creationId xmlns:a16="http://schemas.microsoft.com/office/drawing/2014/main" id="{BC864EE4-3807-4A62-982A-E06A15A12721}"/>
               </a:ext>
             </a:extLst>
           </p:cNvPr>
@@ -4695,7 +4717,7 @@
           <p:cNvPr id="7" name="c3-text-113">
             <a:extLst xmlns:a="http://schemas.openxmlformats.org/drawingml/2006/main">
               <a:ext uri="{FF2B5EF4-FFF2-40B4-BE49-F238E27FC236}">
-                <a16:creationId xmlns:a16="http://schemas.microsoft.com/office/drawing/2014/main" id="{8540A74D-7F43-4BF4-AB46-CC994F93CD64}"/>
+                <a16:creationId xmlns:a16="http://schemas.microsoft.com/office/drawing/2014/main" id="{6B4406FB-6C6F-41D0-8721-0EA99852DEA2}"/>
               </a:ext>
             </a:extLst>
           </p:cNvPr>
@@ -4752,7 +4774,7 @@
           <p:cNvPr id="8" name="c3-text-162">
             <a:extLst xmlns:a="http://schemas.openxmlformats.org/drawingml/2006/main">
               <a:ext uri="{FF2B5EF4-FFF2-40B4-BE49-F238E27FC236}">
-                <a16:creationId xmlns:a16="http://schemas.microsoft.com/office/drawing/2014/main" id="{CEECFB56-AB6E-41B1-AB5B-A30F705DE43C}"/>
+                <a16:creationId xmlns:a16="http://schemas.microsoft.com/office/drawing/2014/main" id="{A7D6ADF5-CCAE-41A1-9EDA-F66AC4F872BA}"/>
               </a:ext>
             </a:extLst>
           </p:cNvPr>
@@ -4807,7 +4829,7 @@
     </p:spTree>
     <p:extLst>
       <p:ext uri="{BB962C8B-B14F-4D97-AF65-F5344CB8AC3E}">
-        <p14:creationId xmlns:p14="http://schemas.microsoft.com/office/powerpoint/2010/main" val="1127109461"/>
+        <p14:creationId xmlns:p14="http://schemas.microsoft.com/office/powerpoint/2010/main" val="1633658491"/>
       </p:ext>
     </p:extLst>
   </p:cSld>
@@ -4838,7 +4860,7 @@
           <p:cNvPr id="14" name="c3-text-114">
             <a:extLst xmlns:a="http://schemas.openxmlformats.org/drawingml/2006/main">
               <a:ext uri="{FF2B5EF4-FFF2-40B4-BE49-F238E27FC236}">
-                <a16:creationId xmlns:a16="http://schemas.microsoft.com/office/drawing/2014/main" id="{DD557D89-AA46-4362-AC8A-4F33FB455888}"/>
+                <a16:creationId xmlns:a16="http://schemas.microsoft.com/office/drawing/2014/main" id="{2C426401-2419-43B7-A0F8-B107DF227410}"/>
               </a:ext>
             </a:extLst>
           </p:cNvPr>
@@ -4895,7 +4917,7 @@
           <p:cNvPr id="2" name="c3-text-115">
             <a:extLst xmlns:a="http://schemas.openxmlformats.org/drawingml/2006/main">
               <a:ext uri="{FF2B5EF4-FFF2-40B4-BE49-F238E27FC236}">
-                <a16:creationId xmlns:a16="http://schemas.microsoft.com/office/drawing/2014/main" id="{C35CACAF-0886-4FC4-B90A-FDEF5CB2068B}"/>
+                <a16:creationId xmlns:a16="http://schemas.microsoft.com/office/drawing/2014/main" id="{95492825-4D8C-4E5B-B3A7-94794E9C0CC4}"/>
               </a:ext>
             </a:extLst>
           </p:cNvPr>
@@ -4952,7 +4974,7 @@
           <p:cNvPr id="3" name="c3-text-116">
             <a:extLst xmlns:a="http://schemas.openxmlformats.org/drawingml/2006/main">
               <a:ext uri="{FF2B5EF4-FFF2-40B4-BE49-F238E27FC236}">
-                <a16:creationId xmlns:a16="http://schemas.microsoft.com/office/drawing/2014/main" id="{58C96572-81A0-4C27-B3F9-9E88CDE793FC}"/>
+                <a16:creationId xmlns:a16="http://schemas.microsoft.com/office/drawing/2014/main" id="{26F2938E-5986-4C85-9F42-67283F2E665F}"/>
               </a:ext>
             </a:extLst>
           </p:cNvPr>
@@ -5009,7 +5031,7 @@
           <p:cNvPr id="4" name="c3-shape-117">
             <a:extLst xmlns:a="http://schemas.openxmlformats.org/drawingml/2006/main">
               <a:ext uri="{FF2B5EF4-FFF2-40B4-BE49-F238E27FC236}">
-                <a16:creationId xmlns:a16="http://schemas.microsoft.com/office/drawing/2014/main" id="{32228FDC-41D3-45B6-80BE-EA2F7F831053}"/>
+                <a16:creationId xmlns:a16="http://schemas.microsoft.com/office/drawing/2014/main" id="{8C0430A7-21CA-43FB-ACFE-1B6F745D05DB}"/>
               </a:ext>
             </a:extLst>
           </p:cNvPr>
@@ -5043,7 +5065,7 @@
           <p:cNvPr id="5" name="c3-shape-118">
             <a:extLst xmlns:a="http://schemas.openxmlformats.org/drawingml/2006/main">
               <a:ext uri="{FF2B5EF4-FFF2-40B4-BE49-F238E27FC236}">
-                <a16:creationId xmlns:a16="http://schemas.microsoft.com/office/drawing/2014/main" id="{30A41E5C-CC68-45AF-965A-12836DC3E21E}"/>
+                <a16:creationId xmlns:a16="http://schemas.microsoft.com/office/drawing/2014/main" id="{994216FF-EE48-4838-977A-4324A0C00E29}"/>
               </a:ext>
             </a:extLst>
           </p:cNvPr>
@@ -5075,7 +5097,7 @@
           <p:cNvPr id="6" name="c3-text-119">
             <a:extLst xmlns:a="http://schemas.openxmlformats.org/drawingml/2006/main">
               <a:ext uri="{FF2B5EF4-FFF2-40B4-BE49-F238E27FC236}">
-                <a16:creationId xmlns:a16="http://schemas.microsoft.com/office/drawing/2014/main" id="{15E06151-68A7-4C13-977A-13592E2E53CB}"/>
+                <a16:creationId xmlns:a16="http://schemas.microsoft.com/office/drawing/2014/main" id="{EAEE5EF4-7FC9-4544-BFF4-FD21B7218297}"/>
               </a:ext>
             </a:extLst>
           </p:cNvPr>
@@ -5132,7 +5154,7 @@
           <p:cNvPr id="7" name="c3-text-120">
             <a:extLst xmlns:a="http://schemas.openxmlformats.org/drawingml/2006/main">
               <a:ext uri="{FF2B5EF4-FFF2-40B4-BE49-F238E27FC236}">
-                <a16:creationId xmlns:a16="http://schemas.microsoft.com/office/drawing/2014/main" id="{D60B4341-1E4C-4CB8-8880-D72A0AE3C2CD}"/>
+                <a16:creationId xmlns:a16="http://schemas.microsoft.com/office/drawing/2014/main" id="{716DA286-7833-4823-986F-EB248442B737}"/>
               </a:ext>
             </a:extLst>
           </p:cNvPr>
@@ -5235,7 +5257,7 @@
           <p:cNvPr id="8" name="c3-shape-121">
             <a:extLst xmlns:a="http://schemas.openxmlformats.org/drawingml/2006/main">
               <a:ext uri="{FF2B5EF4-FFF2-40B4-BE49-F238E27FC236}">
-                <a16:creationId xmlns:a16="http://schemas.microsoft.com/office/drawing/2014/main" id="{E5F436B9-5734-4AC3-8075-096EB392D0CF}"/>
+                <a16:creationId xmlns:a16="http://schemas.microsoft.com/office/drawing/2014/main" id="{2603DC05-C1D9-463A-A0B2-7F3BD1EF2489}"/>
               </a:ext>
             </a:extLst>
           </p:cNvPr>
@@ -5269,7 +5291,7 @@
           <p:cNvPr id="9" name="c3-shape-122">
             <a:extLst xmlns:a="http://schemas.openxmlformats.org/drawingml/2006/main">
               <a:ext uri="{FF2B5EF4-FFF2-40B4-BE49-F238E27FC236}">
-                <a16:creationId xmlns:a16="http://schemas.microsoft.com/office/drawing/2014/main" id="{728362CB-3DB0-4799-B16F-AE08F9061DFD}"/>
+                <a16:creationId xmlns:a16="http://schemas.microsoft.com/office/drawing/2014/main" id="{C9AC1644-574C-4684-A90D-EF399776C1AD}"/>
               </a:ext>
             </a:extLst>
           </p:cNvPr>
@@ -5301,7 +5323,7 @@
           <p:cNvPr id="10" name="c3-text-123">
             <a:extLst xmlns:a="http://schemas.openxmlformats.org/drawingml/2006/main">
               <a:ext uri="{FF2B5EF4-FFF2-40B4-BE49-F238E27FC236}">
-                <a16:creationId xmlns:a16="http://schemas.microsoft.com/office/drawing/2014/main" id="{EB9FB22E-1580-40CB-A629-E237A8D2FD8B}"/>
+                <a16:creationId xmlns:a16="http://schemas.microsoft.com/office/drawing/2014/main" id="{8862657A-B1AB-442B-AA5E-D0930FFF9130}"/>
               </a:ext>
             </a:extLst>
           </p:cNvPr>
@@ -5358,7 +5380,7 @@
           <p:cNvPr id="11" name="c3-text-124">
             <a:extLst xmlns:a="http://schemas.openxmlformats.org/drawingml/2006/main">
               <a:ext uri="{FF2B5EF4-FFF2-40B4-BE49-F238E27FC236}">
-                <a16:creationId xmlns:a16="http://schemas.microsoft.com/office/drawing/2014/main" id="{3DACD8F8-6A67-4859-8C7A-EDDECBDB23A7}"/>
+                <a16:creationId xmlns:a16="http://schemas.microsoft.com/office/drawing/2014/main" id="{632C7A2F-7672-4ADB-B8F4-F24C948BE841}"/>
               </a:ext>
             </a:extLst>
           </p:cNvPr>
@@ -5428,7 +5450,7 @@
                 <a:ea typeface="Calibri"/>
                 <a:cs typeface="Calibri"/>
               </a:rPr>
-              <a:t>When is the colour forgotten?</a:t>
+              <a:t>Inspect the recent messages.</a:t>
             </a:r>
           </a:p>
           <a:p xmlns:a="http://schemas.openxmlformats.org/drawingml/2006/main">
@@ -5451,7 +5473,7 @@
                 <a:ea typeface="Calibri"/>
                 <a:cs typeface="Calibri"/>
               </a:rPr>
-              <a:t>Is it still in the saved state?</a:t>
+              <a:t>Compare with the saved state.</a:t>
             </a:r>
           </a:p>
         </p:txBody>
@@ -5459,10 +5481,10 @@
       <p:sp>
         <p:nvSpPr>
           <p:cNvPr id="12" name="c3-text-125">
-            <a:hlinkClick xmlns:r="http://schemas.openxmlformats.org/officeDocument/2006/relationships" xmlns:a="http://schemas.openxmlformats.org/drawingml/2006/main" r:id="R5cc4a9c5fe8f4f88"/>
-            <a:extLst xmlns:a="http://schemas.openxmlformats.org/drawingml/2006/main">
-              <a:ext uri="{FF2B5EF4-FFF2-40B4-BE49-F238E27FC236}">
-                <a16:creationId xmlns:a16="http://schemas.microsoft.com/office/drawing/2014/main" id="{A57070E5-9B67-40D1-9828-88B24B61D9A8}"/>
+            <a:hlinkClick xmlns:r="http://schemas.openxmlformats.org/officeDocument/2006/relationships" xmlns:a="http://schemas.openxmlformats.org/drawingml/2006/main" r:id="Rf63ba77f1d664ddc"/>
+            <a:extLst xmlns:a="http://schemas.openxmlformats.org/drawingml/2006/main">
+              <a:ext uri="{FF2B5EF4-FFF2-40B4-BE49-F238E27FC236}">
+                <a16:creationId xmlns:a16="http://schemas.microsoft.com/office/drawing/2014/main" id="{F6DB7CA5-224D-4925-9D19-B140BE4B7CF6}"/>
               </a:ext>
             </a:extLst>
           </p:cNvPr>
@@ -5519,7 +5541,7 @@
           <p:cNvPr id="13" name="c3-text-163">
             <a:extLst xmlns:a="http://schemas.openxmlformats.org/drawingml/2006/main">
               <a:ext uri="{FF2B5EF4-FFF2-40B4-BE49-F238E27FC236}">
-                <a16:creationId xmlns:a16="http://schemas.microsoft.com/office/drawing/2014/main" id="{30640599-FF13-42C9-B355-18B0E3E28187}"/>
+                <a16:creationId xmlns:a16="http://schemas.microsoft.com/office/drawing/2014/main" id="{67EF0E3A-8E10-4E68-B71E-7A60F4B0BB17}"/>
               </a:ext>
             </a:extLst>
           </p:cNvPr>
@@ -5574,7 +5596,7 @@
     </p:spTree>
     <p:extLst>
       <p:ext uri="{BB962C8B-B14F-4D97-AF65-F5344CB8AC3E}">
-        <p14:creationId xmlns:p14="http://schemas.microsoft.com/office/powerpoint/2010/main" val="1229415238"/>
+        <p14:creationId xmlns:p14="http://schemas.microsoft.com/office/powerpoint/2010/main" val="699130040"/>
       </p:ext>
     </p:extLst>
   </p:cSld>
@@ -5605,7 +5627,7 @@
           <p:cNvPr id="15" name="c3-text-126">
             <a:extLst xmlns:a="http://schemas.openxmlformats.org/drawingml/2006/main">
               <a:ext uri="{FF2B5EF4-FFF2-40B4-BE49-F238E27FC236}">
-                <a16:creationId xmlns:a16="http://schemas.microsoft.com/office/drawing/2014/main" id="{65301D9B-1CAC-43B5-96A9-4D543439A751}"/>
+                <a16:creationId xmlns:a16="http://schemas.microsoft.com/office/drawing/2014/main" id="{17EA339E-9C90-491F-B2DD-3A3590EFB3DD}"/>
               </a:ext>
             </a:extLst>
           </p:cNvPr>
@@ -5662,7 +5684,7 @@
           <p:cNvPr id="2" name="c3-text-127">
             <a:extLst xmlns:a="http://schemas.openxmlformats.org/drawingml/2006/main">
               <a:ext uri="{FF2B5EF4-FFF2-40B4-BE49-F238E27FC236}">
-                <a16:creationId xmlns:a16="http://schemas.microsoft.com/office/drawing/2014/main" id="{ECD487C5-6E56-44A7-8114-24890FFE97FB}"/>
+                <a16:creationId xmlns:a16="http://schemas.microsoft.com/office/drawing/2014/main" id="{2DDAEC29-65AD-434A-8DBB-F931F9E6005E}"/>
               </a:ext>
             </a:extLst>
           </p:cNvPr>
@@ -5719,7 +5741,7 @@
           <p:cNvPr id="3" name="c3-text-128">
             <a:extLst xmlns:a="http://schemas.openxmlformats.org/drawingml/2006/main">
               <a:ext uri="{FF2B5EF4-FFF2-40B4-BE49-F238E27FC236}">
-                <a16:creationId xmlns:a16="http://schemas.microsoft.com/office/drawing/2014/main" id="{87292F64-E4C9-400E-9F49-EEC5A8A7A714}"/>
+                <a16:creationId xmlns:a16="http://schemas.microsoft.com/office/drawing/2014/main" id="{97A40E75-3A0B-4333-BF31-6408D2218A7B}"/>
               </a:ext>
             </a:extLst>
           </p:cNvPr>
@@ -5776,7 +5798,7 @@
           <p:cNvPr id="4" name="c3-shape-129">
             <a:extLst xmlns:a="http://schemas.openxmlformats.org/drawingml/2006/main">
               <a:ext uri="{FF2B5EF4-FFF2-40B4-BE49-F238E27FC236}">
-                <a16:creationId xmlns:a16="http://schemas.microsoft.com/office/drawing/2014/main" id="{1CE2C4BC-5BF3-4C18-81F0-DB6C8455A48E}"/>
+                <a16:creationId xmlns:a16="http://schemas.microsoft.com/office/drawing/2014/main" id="{9966E546-8FE5-48ED-B15D-94037D523B4E}"/>
               </a:ext>
             </a:extLst>
           </p:cNvPr>
@@ -5810,7 +5832,7 @@
           <p:cNvPr id="5" name="c3-shape-130">
             <a:extLst xmlns:a="http://schemas.openxmlformats.org/drawingml/2006/main">
               <a:ext uri="{FF2B5EF4-FFF2-40B4-BE49-F238E27FC236}">
-                <a16:creationId xmlns:a16="http://schemas.microsoft.com/office/drawing/2014/main" id="{60EF59F5-FA5F-470B-AFFC-50AC7999A90D}"/>
+                <a16:creationId xmlns:a16="http://schemas.microsoft.com/office/drawing/2014/main" id="{F3F99F0F-910D-469C-82D1-BD454F59D115}"/>
               </a:ext>
             </a:extLst>
           </p:cNvPr>
@@ -5842,7 +5864,7 @@
           <p:cNvPr id="6" name="c3-text-131">
             <a:extLst xmlns:a="http://schemas.openxmlformats.org/drawingml/2006/main">
               <a:ext uri="{FF2B5EF4-FFF2-40B4-BE49-F238E27FC236}">
-                <a16:creationId xmlns:a16="http://schemas.microsoft.com/office/drawing/2014/main" id="{2151D993-A8BF-4378-8A4B-BC206B9F3BFE}"/>
+                <a16:creationId xmlns:a16="http://schemas.microsoft.com/office/drawing/2014/main" id="{402DF1BD-CADA-427D-A6EA-5A030FC4F655}"/>
               </a:ext>
             </a:extLst>
           </p:cNvPr>
@@ -5899,7 +5921,7 @@
           <p:cNvPr id="7" name="c3-text-132">
             <a:extLst xmlns:a="http://schemas.openxmlformats.org/drawingml/2006/main">
               <a:ext uri="{FF2B5EF4-FFF2-40B4-BE49-F238E27FC236}">
-                <a16:creationId xmlns:a16="http://schemas.microsoft.com/office/drawing/2014/main" id="{6BA7D66F-8001-4DF7-AAEC-1FE127CA9D95}"/>
+                <a16:creationId xmlns:a16="http://schemas.microsoft.com/office/drawing/2014/main" id="{7A1875A5-9768-4EA5-A7B8-BAA23A7F4F2E}"/>
               </a:ext>
             </a:extLst>
           </p:cNvPr>
@@ -5956,7 +5978,7 @@
           <p:cNvPr id="8" name="c3-shape-133">
             <a:extLst xmlns:a="http://schemas.openxmlformats.org/drawingml/2006/main">
               <a:ext uri="{FF2B5EF4-FFF2-40B4-BE49-F238E27FC236}">
-                <a16:creationId xmlns:a16="http://schemas.microsoft.com/office/drawing/2014/main" id="{DE93284F-BA01-4A46-803F-45CD25F309C3}"/>
+                <a16:creationId xmlns:a16="http://schemas.microsoft.com/office/drawing/2014/main" id="{D34BBEB3-81A9-4E71-B7E7-FCA6DECE92CE}"/>
               </a:ext>
             </a:extLst>
           </p:cNvPr>
@@ -5990,7 +6012,7 @@
           <p:cNvPr id="9" name="c3-shape-134">
             <a:extLst xmlns:a="http://schemas.openxmlformats.org/drawingml/2006/main">
               <a:ext uri="{FF2B5EF4-FFF2-40B4-BE49-F238E27FC236}">
-                <a16:creationId xmlns:a16="http://schemas.microsoft.com/office/drawing/2014/main" id="{1935C400-09DC-4E5A-AECB-87F755E7364B}"/>
+                <a16:creationId xmlns:a16="http://schemas.microsoft.com/office/drawing/2014/main" id="{208263E0-1959-405A-8EB6-599F58B61B1A}"/>
               </a:ext>
             </a:extLst>
           </p:cNvPr>
@@ -6022,7 +6044,7 @@
           <p:cNvPr id="10" name="c3-text-135">
             <a:extLst xmlns:a="http://schemas.openxmlformats.org/drawingml/2006/main">
               <a:ext uri="{FF2B5EF4-FFF2-40B4-BE49-F238E27FC236}">
-                <a16:creationId xmlns:a16="http://schemas.microsoft.com/office/drawing/2014/main" id="{B72C072C-6F60-49AD-A286-0111DB676A44}"/>
+                <a16:creationId xmlns:a16="http://schemas.microsoft.com/office/drawing/2014/main" id="{04FFB531-DE0F-4B2C-9AF1-F71F589CEAF7}"/>
               </a:ext>
             </a:extLst>
           </p:cNvPr>
@@ -6079,7 +6101,7 @@
           <p:cNvPr id="11" name="c3-text-136">
             <a:extLst xmlns:a="http://schemas.openxmlformats.org/drawingml/2006/main">
               <a:ext uri="{FF2B5EF4-FFF2-40B4-BE49-F238E27FC236}">
-                <a16:creationId xmlns:a16="http://schemas.microsoft.com/office/drawing/2014/main" id="{6A639B3F-38EA-46AF-9CC6-B0E7BD1695C7}"/>
+                <a16:creationId xmlns:a16="http://schemas.microsoft.com/office/drawing/2014/main" id="{8C02D6A6-4647-40A7-9B8C-79FAD0DA9B33}"/>
               </a:ext>
             </a:extLst>
           </p:cNvPr>
@@ -6159,7 +6181,7 @@
           <p:cNvPr id="12" name="c3-shape-137">
             <a:extLst xmlns:a="http://schemas.openxmlformats.org/drawingml/2006/main">
               <a:ext uri="{FF2B5EF4-FFF2-40B4-BE49-F238E27FC236}">
-                <a16:creationId xmlns:a16="http://schemas.microsoft.com/office/drawing/2014/main" id="{71BA8B00-DBF1-4ADF-8226-F683F9F66A47}"/>
+                <a16:creationId xmlns:a16="http://schemas.microsoft.com/office/drawing/2014/main" id="{5BECF62D-7F32-41F8-BC2D-CEED16BF67C4}"/>
               </a:ext>
             </a:extLst>
           </p:cNvPr>
@@ -6193,7 +6215,7 @@
           <p:cNvPr id="13" name="c3-text-138">
             <a:extLst xmlns:a="http://schemas.openxmlformats.org/drawingml/2006/main">
               <a:ext uri="{FF2B5EF4-FFF2-40B4-BE49-F238E27FC236}">
-                <a16:creationId xmlns:a16="http://schemas.microsoft.com/office/drawing/2014/main" id="{AC60CB94-F664-4691-8003-B885FF1F97F9}"/>
+                <a16:creationId xmlns:a16="http://schemas.microsoft.com/office/drawing/2014/main" id="{BC545949-0D7E-4FC1-AA13-AF314BB70C6A}"/>
               </a:ext>
             </a:extLst>
           </p:cNvPr>
@@ -6250,7 +6272,7 @@
           <p:cNvPr id="14" name="c3-text-164">
             <a:extLst xmlns:a="http://schemas.openxmlformats.org/drawingml/2006/main">
               <a:ext uri="{FF2B5EF4-FFF2-40B4-BE49-F238E27FC236}">
-                <a16:creationId xmlns:a16="http://schemas.microsoft.com/office/drawing/2014/main" id="{540A7750-6D51-4F15-AE9A-75A78E35FB0C}"/>
+                <a16:creationId xmlns:a16="http://schemas.microsoft.com/office/drawing/2014/main" id="{B78409FB-A302-4401-A8E4-BF1EC0FB7278}"/>
               </a:ext>
             </a:extLst>
           </p:cNvPr>
@@ -6305,7 +6327,7 @@
     </p:spTree>
     <p:extLst>
       <p:ext uri="{BB962C8B-B14F-4D97-AF65-F5344CB8AC3E}">
-        <p14:creationId xmlns:p14="http://schemas.microsoft.com/office/powerpoint/2010/main" val="177495809"/>
+        <p14:creationId xmlns:p14="http://schemas.microsoft.com/office/powerpoint/2010/main" val="298690738"/>
       </p:ext>
     </p:extLst>
   </p:cSld>
@@ -6336,7 +6358,7 @@
           <p:cNvPr id="14" name="c3-text-139">
             <a:extLst xmlns:a="http://schemas.openxmlformats.org/drawingml/2006/main">
               <a:ext uri="{FF2B5EF4-FFF2-40B4-BE49-F238E27FC236}">
-                <a16:creationId xmlns:a16="http://schemas.microsoft.com/office/drawing/2014/main" id="{E94749C6-E686-4494-8D46-58B696711EE2}"/>
+                <a16:creationId xmlns:a16="http://schemas.microsoft.com/office/drawing/2014/main" id="{B4F34BC7-0599-4900-8C42-2AECEEB287FE}"/>
               </a:ext>
             </a:extLst>
           </p:cNvPr>
@@ -6393,7 +6415,7 @@
           <p:cNvPr id="2" name="c3-text-140">
             <a:extLst xmlns:a="http://schemas.openxmlformats.org/drawingml/2006/main">
               <a:ext uri="{FF2B5EF4-FFF2-40B4-BE49-F238E27FC236}">
-                <a16:creationId xmlns:a16="http://schemas.microsoft.com/office/drawing/2014/main" id="{7E3A60F8-AE42-4EE0-A5BB-69FDA48EDBAC}"/>
+                <a16:creationId xmlns:a16="http://schemas.microsoft.com/office/drawing/2014/main" id="{EFF9B330-D2A7-4582-9DC3-8D38C19B504A}"/>
               </a:ext>
             </a:extLst>
           </p:cNvPr>
@@ -6450,7 +6472,7 @@
           <p:cNvPr id="3" name="c3-text-141">
             <a:extLst xmlns:a="http://schemas.openxmlformats.org/drawingml/2006/main">
               <a:ext uri="{FF2B5EF4-FFF2-40B4-BE49-F238E27FC236}">
-                <a16:creationId xmlns:a16="http://schemas.microsoft.com/office/drawing/2014/main" id="{C0ABABCA-F777-46F9-A035-AE762993BEAB}"/>
+                <a16:creationId xmlns:a16="http://schemas.microsoft.com/office/drawing/2014/main" id="{C566649E-F10F-48B4-B8F5-9BB3D1F87F91}"/>
               </a:ext>
             </a:extLst>
           </p:cNvPr>
@@ -6505,10 +6527,10 @@
       <p:sp>
         <p:nvSpPr>
           <p:cNvPr id="4" name="c3-text-142">
-            <a:hlinkClick xmlns:r="http://schemas.openxmlformats.org/officeDocument/2006/relationships" xmlns:a="http://schemas.openxmlformats.org/drawingml/2006/main" r:id="R2ba8b9930ee944a8"/>
-            <a:extLst xmlns:a="http://schemas.openxmlformats.org/drawingml/2006/main">
-              <a:ext uri="{FF2B5EF4-FFF2-40B4-BE49-F238E27FC236}">
-                <a16:creationId xmlns:a16="http://schemas.microsoft.com/office/drawing/2014/main" id="{2D79798F-2F25-4A39-9A19-C1DE9388DDFB}"/>
+            <a:hlinkClick xmlns:r="http://schemas.openxmlformats.org/officeDocument/2006/relationships" xmlns:a="http://schemas.openxmlformats.org/drawingml/2006/main" r:id="R5c6b8b27ba2c4519"/>
+            <a:extLst xmlns:a="http://schemas.openxmlformats.org/drawingml/2006/main">
+              <a:ext uri="{FF2B5EF4-FFF2-40B4-BE49-F238E27FC236}">
+                <a16:creationId xmlns:a16="http://schemas.microsoft.com/office/drawing/2014/main" id="{54E6CA49-9EE2-411F-B6DD-3DE60E275523}"/>
               </a:ext>
             </a:extLst>
           </p:cNvPr>
@@ -6563,10 +6585,10 @@
       <p:sp>
         <p:nvSpPr>
           <p:cNvPr id="5" name="c3-text-143">
-            <a:hlinkClick xmlns:r="http://schemas.openxmlformats.org/officeDocument/2006/relationships" xmlns:a="http://schemas.openxmlformats.org/drawingml/2006/main" r:id="R2ad0e50692c9476a"/>
-            <a:extLst xmlns:a="http://schemas.openxmlformats.org/drawingml/2006/main">
-              <a:ext uri="{FF2B5EF4-FFF2-40B4-BE49-F238E27FC236}">
-                <a16:creationId xmlns:a16="http://schemas.microsoft.com/office/drawing/2014/main" id="{8ABDE5FD-F1F4-4F01-AB53-E2C9D5FB798F}"/>
+            <a:hlinkClick xmlns:r="http://schemas.openxmlformats.org/officeDocument/2006/relationships" xmlns:a="http://schemas.openxmlformats.org/drawingml/2006/main" r:id="Rbba8e70d6f79402f"/>
+            <a:extLst xmlns:a="http://schemas.openxmlformats.org/drawingml/2006/main">
+              <a:ext uri="{FF2B5EF4-FFF2-40B4-BE49-F238E27FC236}">
+                <a16:creationId xmlns:a16="http://schemas.microsoft.com/office/drawing/2014/main" id="{F4ED3234-88C3-4841-809C-174C077A8DA1}"/>
               </a:ext>
             </a:extLst>
           </p:cNvPr>
@@ -6623,7 +6645,7 @@
           <p:cNvPr id="6" name="c3-shape-144">
             <a:extLst xmlns:a="http://schemas.openxmlformats.org/drawingml/2006/main">
               <a:ext uri="{FF2B5EF4-FFF2-40B4-BE49-F238E27FC236}">
-                <a16:creationId xmlns:a16="http://schemas.microsoft.com/office/drawing/2014/main" id="{F859F580-689B-41D3-999D-46CDB2700054}"/>
+                <a16:creationId xmlns:a16="http://schemas.microsoft.com/office/drawing/2014/main" id="{823A3EE4-E9A8-4697-BA91-D455ED3707EA}"/>
               </a:ext>
             </a:extLst>
           </p:cNvPr>
@@ -6653,10 +6675,10 @@
       <p:sp>
         <p:nvSpPr>
           <p:cNvPr id="7" name="c3-text-145">
-            <a:hlinkClick xmlns:r="http://schemas.openxmlformats.org/officeDocument/2006/relationships" xmlns:a="http://schemas.openxmlformats.org/drawingml/2006/main" r:id="R306a9d5c97a744d5"/>
-            <a:extLst xmlns:a="http://schemas.openxmlformats.org/drawingml/2006/main">
-              <a:ext uri="{FF2B5EF4-FFF2-40B4-BE49-F238E27FC236}">
-                <a16:creationId xmlns:a16="http://schemas.microsoft.com/office/drawing/2014/main" id="{3626B71A-F026-4BCC-B769-6D7D7032FA0D}"/>
+            <a:hlinkClick xmlns:r="http://schemas.openxmlformats.org/officeDocument/2006/relationships" xmlns:a="http://schemas.openxmlformats.org/drawingml/2006/main" r:id="R35b5095f106c4cf5"/>
+            <a:extLst xmlns:a="http://schemas.openxmlformats.org/drawingml/2006/main">
+              <a:ext uri="{FF2B5EF4-FFF2-40B4-BE49-F238E27FC236}">
+                <a16:creationId xmlns:a16="http://schemas.microsoft.com/office/drawing/2014/main" id="{262B0F07-7B0E-4ECE-B685-AC8AE43CA2FF}"/>
               </a:ext>
             </a:extLst>
           </p:cNvPr>
@@ -6711,10 +6733,10 @@
       <p:sp>
         <p:nvSpPr>
           <p:cNvPr id="8" name="c3-text-146">
-            <a:hlinkClick xmlns:r="http://schemas.openxmlformats.org/officeDocument/2006/relationships" xmlns:a="http://schemas.openxmlformats.org/drawingml/2006/main" r:id="R88ad1f5e73984bb1"/>
-            <a:extLst xmlns:a="http://schemas.openxmlformats.org/drawingml/2006/main">
-              <a:ext uri="{FF2B5EF4-FFF2-40B4-BE49-F238E27FC236}">
-                <a16:creationId xmlns:a16="http://schemas.microsoft.com/office/drawing/2014/main" id="{9A7E41EC-6FEA-436C-9DF5-663B77039F4B}"/>
+            <a:hlinkClick xmlns:r="http://schemas.openxmlformats.org/officeDocument/2006/relationships" xmlns:a="http://schemas.openxmlformats.org/drawingml/2006/main" r:id="R78984ab9c4ab4d1f"/>
+            <a:extLst xmlns:a="http://schemas.openxmlformats.org/drawingml/2006/main">
+              <a:ext uri="{FF2B5EF4-FFF2-40B4-BE49-F238E27FC236}">
+                <a16:creationId xmlns:a16="http://schemas.microsoft.com/office/drawing/2014/main" id="{51C989FD-1CD6-4A6D-A35C-828587226DD0}"/>
               </a:ext>
             </a:extLst>
           </p:cNvPr>
@@ -6771,7 +6793,7 @@
           <p:cNvPr id="9" name="c3-shape-147">
             <a:extLst xmlns:a="http://schemas.openxmlformats.org/drawingml/2006/main">
               <a:ext uri="{FF2B5EF4-FFF2-40B4-BE49-F238E27FC236}">
-                <a16:creationId xmlns:a16="http://schemas.microsoft.com/office/drawing/2014/main" id="{D670639C-1763-4411-9A7C-39D0DA09B611}"/>
+                <a16:creationId xmlns:a16="http://schemas.microsoft.com/office/drawing/2014/main" id="{C3392718-8AD4-4657-976B-DACA887914A3}"/>
               </a:ext>
             </a:extLst>
           </p:cNvPr>
@@ -6801,10 +6823,10 @@
       <p:sp>
         <p:nvSpPr>
           <p:cNvPr id="10" name="c3-text-148">
-            <a:hlinkClick xmlns:r="http://schemas.openxmlformats.org/officeDocument/2006/relationships" xmlns:a="http://schemas.openxmlformats.org/drawingml/2006/main" r:id="R7062174c92e44b6f"/>
-            <a:extLst xmlns:a="http://schemas.openxmlformats.org/drawingml/2006/main">
-              <a:ext uri="{FF2B5EF4-FFF2-40B4-BE49-F238E27FC236}">
-                <a16:creationId xmlns:a16="http://schemas.microsoft.com/office/drawing/2014/main" id="{1252F5F0-9402-4425-83DB-54C2C39176B1}"/>
+            <a:hlinkClick xmlns:r="http://schemas.openxmlformats.org/officeDocument/2006/relationships" xmlns:a="http://schemas.openxmlformats.org/drawingml/2006/main" r:id="Rcbd3df97e1a94c19"/>
+            <a:extLst xmlns:a="http://schemas.openxmlformats.org/drawingml/2006/main">
+              <a:ext uri="{FF2B5EF4-FFF2-40B4-BE49-F238E27FC236}">
+                <a16:creationId xmlns:a16="http://schemas.microsoft.com/office/drawing/2014/main" id="{E7EC23B6-E563-4C8D-B8E0-DDF40C2AB4A8}"/>
               </a:ext>
             </a:extLst>
           </p:cNvPr>
@@ -6859,10 +6881,10 @@
       <p:sp>
         <p:nvSpPr>
           <p:cNvPr id="11" name="c3-text-149">
-            <a:hlinkClick xmlns:r="http://schemas.openxmlformats.org/officeDocument/2006/relationships" xmlns:a="http://schemas.openxmlformats.org/drawingml/2006/main" r:id="R8ebfc0158c4b437e"/>
-            <a:extLst xmlns:a="http://schemas.openxmlformats.org/drawingml/2006/main">
-              <a:ext uri="{FF2B5EF4-FFF2-40B4-BE49-F238E27FC236}">
-                <a16:creationId xmlns:a16="http://schemas.microsoft.com/office/drawing/2014/main" id="{8AAA708D-ED05-42C6-9F29-589893CF4104}"/>
+            <a:hlinkClick xmlns:r="http://schemas.openxmlformats.org/officeDocument/2006/relationships" xmlns:a="http://schemas.openxmlformats.org/drawingml/2006/main" r:id="Rb8e58c86162c44b6"/>
+            <a:extLst xmlns:a="http://schemas.openxmlformats.org/drawingml/2006/main">
+              <a:ext uri="{FF2B5EF4-FFF2-40B4-BE49-F238E27FC236}">
+                <a16:creationId xmlns:a16="http://schemas.microsoft.com/office/drawing/2014/main" id="{2AB7E59B-5921-4D05-9EAB-4143595521B7}"/>
               </a:ext>
             </a:extLst>
           </p:cNvPr>
@@ -6919,7 +6941,7 @@
           <p:cNvPr id="12" name="c3-shape-150">
             <a:extLst xmlns:a="http://schemas.openxmlformats.org/drawingml/2006/main">
               <a:ext uri="{FF2B5EF4-FFF2-40B4-BE49-F238E27FC236}">
-                <a16:creationId xmlns:a16="http://schemas.microsoft.com/office/drawing/2014/main" id="{929DB829-F78E-4A65-B6E4-01ADD7CF38EE}"/>
+                <a16:creationId xmlns:a16="http://schemas.microsoft.com/office/drawing/2014/main" id="{45597E6D-0370-4DC2-A2C8-562E6C5FC1EA}"/>
               </a:ext>
             </a:extLst>
           </p:cNvPr>
@@ -6951,7 +6973,7 @@
           <p:cNvPr id="13" name="c3-text-165">
             <a:extLst xmlns:a="http://schemas.openxmlformats.org/drawingml/2006/main">
               <a:ext uri="{FF2B5EF4-FFF2-40B4-BE49-F238E27FC236}">
-                <a16:creationId xmlns:a16="http://schemas.microsoft.com/office/drawing/2014/main" id="{CD0512E7-2128-4688-9EB5-F0DABA26DA12}"/>
+                <a16:creationId xmlns:a16="http://schemas.microsoft.com/office/drawing/2014/main" id="{F9DB05CC-0AD9-48DC-97E4-7D017ED0767C}"/>
               </a:ext>
             </a:extLst>
           </p:cNvPr>
@@ -7006,7 +7028,7 @@
     </p:spTree>
     <p:extLst>
       <p:ext uri="{BB962C8B-B14F-4D97-AF65-F5344CB8AC3E}">
-        <p14:creationId xmlns:p14="http://schemas.microsoft.com/office/powerpoint/2010/main" val="382481578"/>
+        <p14:creationId xmlns:p14="http://schemas.microsoft.com/office/powerpoint/2010/main" val="737308198"/>
       </p:ext>
     </p:extLst>
   </p:cSld>
@@ -7037,7 +7059,7 @@
           <p:cNvPr id="15" name="c3-text-1">
             <a:extLst xmlns:a="http://schemas.openxmlformats.org/drawingml/2006/main">
               <a:ext uri="{FF2B5EF4-FFF2-40B4-BE49-F238E27FC236}">
-                <a16:creationId xmlns:a16="http://schemas.microsoft.com/office/drawing/2014/main" id="{5B3AEAEF-A515-4BB9-8A91-5195BBBE7CBD}"/>
+                <a16:creationId xmlns:a16="http://schemas.microsoft.com/office/drawing/2014/main" id="{6F0168DE-20F0-4F69-BEF0-9F1C28BF8A97}"/>
               </a:ext>
             </a:extLst>
           </p:cNvPr>
@@ -7094,7 +7116,7 @@
           <p:cNvPr id="2" name="c3-text-2">
             <a:extLst xmlns:a="http://schemas.openxmlformats.org/drawingml/2006/main">
               <a:ext uri="{FF2B5EF4-FFF2-40B4-BE49-F238E27FC236}">
-                <a16:creationId xmlns:a16="http://schemas.microsoft.com/office/drawing/2014/main" id="{E23150E1-8418-42C6-9184-85BB3FBD79BF}"/>
+                <a16:creationId xmlns:a16="http://schemas.microsoft.com/office/drawing/2014/main" id="{61F6527B-51D1-49CA-973E-83415476D452}"/>
               </a:ext>
             </a:extLst>
           </p:cNvPr>
@@ -7151,7 +7173,7 @@
           <p:cNvPr id="3" name="c3-text-3">
             <a:extLst xmlns:a="http://schemas.openxmlformats.org/drawingml/2006/main">
               <a:ext uri="{FF2B5EF4-FFF2-40B4-BE49-F238E27FC236}">
-                <a16:creationId xmlns:a16="http://schemas.microsoft.com/office/drawing/2014/main" id="{8B69F0B7-06F9-454E-B032-92704E4AD7F7}"/>
+                <a16:creationId xmlns:a16="http://schemas.microsoft.com/office/drawing/2014/main" id="{32C796B7-3D6B-4BFF-A655-7CC935309D98}"/>
               </a:ext>
             </a:extLst>
           </p:cNvPr>
@@ -7208,7 +7230,7 @@
           <p:cNvPr id="4" name="c3-shape-4">
             <a:extLst xmlns:a="http://schemas.openxmlformats.org/drawingml/2006/main">
               <a:ext uri="{FF2B5EF4-FFF2-40B4-BE49-F238E27FC236}">
-                <a16:creationId xmlns:a16="http://schemas.microsoft.com/office/drawing/2014/main" id="{32F6E9E4-3394-4AA2-B1D1-6E5F8F91BBAD}"/>
+                <a16:creationId xmlns:a16="http://schemas.microsoft.com/office/drawing/2014/main" id="{AA180B26-D998-4FC3-A2BC-445260777C42}"/>
               </a:ext>
             </a:extLst>
           </p:cNvPr>
@@ -7242,7 +7264,7 @@
           <p:cNvPr id="5" name="c3-shape-5">
             <a:extLst xmlns:a="http://schemas.openxmlformats.org/drawingml/2006/main">
               <a:ext uri="{FF2B5EF4-FFF2-40B4-BE49-F238E27FC236}">
-                <a16:creationId xmlns:a16="http://schemas.microsoft.com/office/drawing/2014/main" id="{78A6AC00-E9F6-4092-8402-D85D7C949A12}"/>
+                <a16:creationId xmlns:a16="http://schemas.microsoft.com/office/drawing/2014/main" id="{6B87890B-0C38-413E-8C3E-0BDDA1579FAF}"/>
               </a:ext>
             </a:extLst>
           </p:cNvPr>
@@ -7274,7 +7296,7 @@
           <p:cNvPr id="6" name="c3-text-6">
             <a:extLst xmlns:a="http://schemas.openxmlformats.org/drawingml/2006/main">
               <a:ext uri="{FF2B5EF4-FFF2-40B4-BE49-F238E27FC236}">
-                <a16:creationId xmlns:a16="http://schemas.microsoft.com/office/drawing/2014/main" id="{E64DD933-9D02-4B7D-B60C-EC1582C6D6FD}"/>
+                <a16:creationId xmlns:a16="http://schemas.microsoft.com/office/drawing/2014/main" id="{8BADC7F9-0195-43CC-8C08-57786CDA657D}"/>
               </a:ext>
             </a:extLst>
           </p:cNvPr>
@@ -7331,7 +7353,7 @@
           <p:cNvPr id="7" name="c3-text-7">
             <a:extLst xmlns:a="http://schemas.openxmlformats.org/drawingml/2006/main">
               <a:ext uri="{FF2B5EF4-FFF2-40B4-BE49-F238E27FC236}">
-                <a16:creationId xmlns:a16="http://schemas.microsoft.com/office/drawing/2014/main" id="{96414B2D-4A68-4E74-B03B-3F25FAC68E33}"/>
+                <a16:creationId xmlns:a16="http://schemas.microsoft.com/office/drawing/2014/main" id="{59646EE9-9A0E-471A-887E-7CCE15055A64}"/>
               </a:ext>
             </a:extLst>
           </p:cNvPr>
@@ -7411,7 +7433,7 @@
           <p:cNvPr id="8" name="c3-shape-8">
             <a:extLst xmlns:a="http://schemas.openxmlformats.org/drawingml/2006/main">
               <a:ext uri="{FF2B5EF4-FFF2-40B4-BE49-F238E27FC236}">
-                <a16:creationId xmlns:a16="http://schemas.microsoft.com/office/drawing/2014/main" id="{37AA19AC-F992-4CBE-82B8-2D701A2B1240}"/>
+                <a16:creationId xmlns:a16="http://schemas.microsoft.com/office/drawing/2014/main" id="{340DCD1D-4580-4346-A33F-02DDE7B59F7B}"/>
               </a:ext>
             </a:extLst>
           </p:cNvPr>
@@ -7445,7 +7467,7 @@
           <p:cNvPr id="9" name="c3-shape-9">
             <a:extLst xmlns:a="http://schemas.openxmlformats.org/drawingml/2006/main">
               <a:ext uri="{FF2B5EF4-FFF2-40B4-BE49-F238E27FC236}">
-                <a16:creationId xmlns:a16="http://schemas.microsoft.com/office/drawing/2014/main" id="{85D81A89-75D6-4535-B82E-B9879BF2B155}"/>
+                <a16:creationId xmlns:a16="http://schemas.microsoft.com/office/drawing/2014/main" id="{779ABC6B-EB82-4B36-8DB1-7BF1737E6E72}"/>
               </a:ext>
             </a:extLst>
           </p:cNvPr>
@@ -7477,7 +7499,7 @@
           <p:cNvPr id="10" name="c3-text-10">
             <a:extLst xmlns:a="http://schemas.openxmlformats.org/drawingml/2006/main">
               <a:ext uri="{FF2B5EF4-FFF2-40B4-BE49-F238E27FC236}">
-                <a16:creationId xmlns:a16="http://schemas.microsoft.com/office/drawing/2014/main" id="{F711FE5C-0E24-452C-8C80-93FCDC2A3DDD}"/>
+                <a16:creationId xmlns:a16="http://schemas.microsoft.com/office/drawing/2014/main" id="{08791A3A-8B0A-4EDA-B714-FF03B4FD3782}"/>
               </a:ext>
             </a:extLst>
           </p:cNvPr>
@@ -7534,7 +7556,7 @@
           <p:cNvPr id="11" name="c3-text-11">
             <a:extLst xmlns:a="http://schemas.openxmlformats.org/drawingml/2006/main">
               <a:ext uri="{FF2B5EF4-FFF2-40B4-BE49-F238E27FC236}">
-                <a16:creationId xmlns:a16="http://schemas.microsoft.com/office/drawing/2014/main" id="{7804435E-2080-4661-AB25-E1F9B35B30F1}"/>
+                <a16:creationId xmlns:a16="http://schemas.microsoft.com/office/drawing/2014/main" id="{5663A5F2-E0B1-4C55-83BA-8AA148439C95}"/>
               </a:ext>
             </a:extLst>
           </p:cNvPr>
@@ -7614,7 +7636,7 @@
           <p:cNvPr id="12" name="c3-shape-12">
             <a:extLst xmlns:a="http://schemas.openxmlformats.org/drawingml/2006/main">
               <a:ext uri="{FF2B5EF4-FFF2-40B4-BE49-F238E27FC236}">
-                <a16:creationId xmlns:a16="http://schemas.microsoft.com/office/drawing/2014/main" id="{9F95947B-E29C-4F17-9979-7AF69EBA6626}"/>
+                <a16:creationId xmlns:a16="http://schemas.microsoft.com/office/drawing/2014/main" id="{C8DCC1D4-FE45-4263-B40C-14E4D6E0604B}"/>
               </a:ext>
             </a:extLst>
           </p:cNvPr>
@@ -7648,7 +7670,7 @@
           <p:cNvPr id="13" name="c3-text-13">
             <a:extLst xmlns:a="http://schemas.openxmlformats.org/drawingml/2006/main">
               <a:ext uri="{FF2B5EF4-FFF2-40B4-BE49-F238E27FC236}">
-                <a16:creationId xmlns:a16="http://schemas.microsoft.com/office/drawing/2014/main" id="{ED8A5F08-829E-4F8D-BEFD-80B3664BC4EA}"/>
+                <a16:creationId xmlns:a16="http://schemas.microsoft.com/office/drawing/2014/main" id="{EB11056C-CAED-4002-8B3E-67E449112274}"/>
               </a:ext>
             </a:extLst>
           </p:cNvPr>
@@ -7705,7 +7727,7 @@
           <p:cNvPr id="14" name="c3-text-152">
             <a:extLst xmlns:a="http://schemas.openxmlformats.org/drawingml/2006/main">
               <a:ext uri="{FF2B5EF4-FFF2-40B4-BE49-F238E27FC236}">
-                <a16:creationId xmlns:a16="http://schemas.microsoft.com/office/drawing/2014/main" id="{CA2E19F9-27E7-435D-97C1-4EF2D304DFD1}"/>
+                <a16:creationId xmlns:a16="http://schemas.microsoft.com/office/drawing/2014/main" id="{B80A2B97-6968-45FB-9C10-2CE7BFF28C68}"/>
               </a:ext>
             </a:extLst>
           </p:cNvPr>
@@ -7760,7 +7782,7 @@
     </p:spTree>
     <p:extLst>
       <p:ext uri="{BB962C8B-B14F-4D97-AF65-F5344CB8AC3E}">
-        <p14:creationId xmlns:p14="http://schemas.microsoft.com/office/powerpoint/2010/main" val="672518561"/>
+        <p14:creationId xmlns:p14="http://schemas.microsoft.com/office/powerpoint/2010/main" val="119009923"/>
       </p:ext>
     </p:extLst>
   </p:cSld>
@@ -7791,7 +7813,7 @@
           <p:cNvPr id="8" name="c3-text-14">
             <a:extLst xmlns:a="http://schemas.openxmlformats.org/drawingml/2006/main">
               <a:ext uri="{FF2B5EF4-FFF2-40B4-BE49-F238E27FC236}">
-                <a16:creationId xmlns:a16="http://schemas.microsoft.com/office/drawing/2014/main" id="{B981A1BC-A949-4ED5-8CAC-C86581718329}"/>
+                <a16:creationId xmlns:a16="http://schemas.microsoft.com/office/drawing/2014/main" id="{B7E825B3-B62B-4F32-A087-02416DFF5472}"/>
               </a:ext>
             </a:extLst>
           </p:cNvPr>
@@ -7848,7 +7870,7 @@
           <p:cNvPr id="2" name="c3-text-15">
             <a:extLst xmlns:a="http://schemas.openxmlformats.org/drawingml/2006/main">
               <a:ext uri="{FF2B5EF4-FFF2-40B4-BE49-F238E27FC236}">
-                <a16:creationId xmlns:a16="http://schemas.microsoft.com/office/drawing/2014/main" id="{E4921221-9E8A-4578-B617-E4D6287508EC}"/>
+                <a16:creationId xmlns:a16="http://schemas.microsoft.com/office/drawing/2014/main" id="{9E3AC642-5159-46EC-BBAE-830ADCE8CCD0}"/>
               </a:ext>
             </a:extLst>
           </p:cNvPr>
@@ -7905,7 +7927,7 @@
           <p:cNvPr id="3" name="c3-text-16">
             <a:extLst xmlns:a="http://schemas.openxmlformats.org/drawingml/2006/main">
               <a:ext uri="{FF2B5EF4-FFF2-40B4-BE49-F238E27FC236}">
-                <a16:creationId xmlns:a16="http://schemas.microsoft.com/office/drawing/2014/main" id="{D6384B33-3ECA-4570-A121-4D45E3419821}"/>
+                <a16:creationId xmlns:a16="http://schemas.microsoft.com/office/drawing/2014/main" id="{0CEA248C-D6EA-4015-B158-FD5D5AEA330C}"/>
               </a:ext>
             </a:extLst>
           </p:cNvPr>
@@ -7962,7 +7984,7 @@
           <p:cNvPr id="4" name="c3-shape-17">
             <a:extLst xmlns:a="http://schemas.openxmlformats.org/drawingml/2006/main">
               <a:ext uri="{FF2B5EF4-FFF2-40B4-BE49-F238E27FC236}">
-                <a16:creationId xmlns:a16="http://schemas.microsoft.com/office/drawing/2014/main" id="{790E449E-C42E-48B0-A1BF-52AA41727BD9}"/>
+                <a16:creationId xmlns:a16="http://schemas.microsoft.com/office/drawing/2014/main" id="{9C8FC97F-7431-4A2D-AFC5-1839CF1B2F31}"/>
               </a:ext>
             </a:extLst>
           </p:cNvPr>
@@ -7996,7 +8018,7 @@
           <p:cNvPr id="5" name="c3-text-18">
             <a:extLst xmlns:a="http://schemas.openxmlformats.org/drawingml/2006/main">
               <a:ext uri="{FF2B5EF4-FFF2-40B4-BE49-F238E27FC236}">
-                <a16:creationId xmlns:a16="http://schemas.microsoft.com/office/drawing/2014/main" id="{694624B8-C735-4C8D-AFDA-5A59690FC341}"/>
+                <a16:creationId xmlns:a16="http://schemas.microsoft.com/office/drawing/2014/main" id="{D207751D-0582-4B1C-994B-902BA421CB12}"/>
               </a:ext>
             </a:extLst>
           </p:cNvPr>
@@ -8226,7 +8248,7 @@
           <p:cNvPr id="6" name="c3-text-19">
             <a:extLst xmlns:a="http://schemas.openxmlformats.org/drawingml/2006/main">
               <a:ext uri="{FF2B5EF4-FFF2-40B4-BE49-F238E27FC236}">
-                <a16:creationId xmlns:a16="http://schemas.microsoft.com/office/drawing/2014/main" id="{C8BC6563-E1E4-4AE7-8254-284F53276375}"/>
+                <a16:creationId xmlns:a16="http://schemas.microsoft.com/office/drawing/2014/main" id="{9B580DEC-6317-4ECA-8A4A-0FDBA3372F8E}"/>
               </a:ext>
             </a:extLst>
           </p:cNvPr>
@@ -8283,7 +8305,7 @@
           <p:cNvPr id="7" name="c3-text-153">
             <a:extLst xmlns:a="http://schemas.openxmlformats.org/drawingml/2006/main">
               <a:ext uri="{FF2B5EF4-FFF2-40B4-BE49-F238E27FC236}">
-                <a16:creationId xmlns:a16="http://schemas.microsoft.com/office/drawing/2014/main" id="{03FB8412-69B0-4689-962F-62AC4994BD0C}"/>
+                <a16:creationId xmlns:a16="http://schemas.microsoft.com/office/drawing/2014/main" id="{D7CF382B-B021-4257-86A8-5073C281B5AD}"/>
               </a:ext>
             </a:extLst>
           </p:cNvPr>
@@ -8338,7 +8360,7 @@
     </p:spTree>
     <p:extLst>
       <p:ext uri="{BB962C8B-B14F-4D97-AF65-F5344CB8AC3E}">
-        <p14:creationId xmlns:p14="http://schemas.microsoft.com/office/powerpoint/2010/main" val="409528170"/>
+        <p14:creationId xmlns:p14="http://schemas.microsoft.com/office/powerpoint/2010/main" val="1003258880"/>
       </p:ext>
     </p:extLst>
   </p:cSld>
@@ -8369,7 +8391,7 @@
           <p:cNvPr id="15" name="c3-text-20">
             <a:extLst xmlns:a="http://schemas.openxmlformats.org/drawingml/2006/main">
               <a:ext uri="{FF2B5EF4-FFF2-40B4-BE49-F238E27FC236}">
-                <a16:creationId xmlns:a16="http://schemas.microsoft.com/office/drawing/2014/main" id="{C4EEC592-EBEA-4C9E-8833-0DD650DCA0F8}"/>
+                <a16:creationId xmlns:a16="http://schemas.microsoft.com/office/drawing/2014/main" id="{A81B1180-1301-4C96-978A-8012196923C2}"/>
               </a:ext>
             </a:extLst>
           </p:cNvPr>
@@ -8426,7 +8448,7 @@
           <p:cNvPr id="2" name="c3-text-21">
             <a:extLst xmlns:a="http://schemas.openxmlformats.org/drawingml/2006/main">
               <a:ext uri="{FF2B5EF4-FFF2-40B4-BE49-F238E27FC236}">
-                <a16:creationId xmlns:a16="http://schemas.microsoft.com/office/drawing/2014/main" id="{11F746F9-A19C-43E8-BCCF-A501CB552412}"/>
+                <a16:creationId xmlns:a16="http://schemas.microsoft.com/office/drawing/2014/main" id="{1F6A0D41-A0FF-4B85-8324-F9CBD21D8F7D}"/>
               </a:ext>
             </a:extLst>
           </p:cNvPr>
@@ -8483,7 +8505,7 @@
           <p:cNvPr id="3" name="c3-text-22">
             <a:extLst xmlns:a="http://schemas.openxmlformats.org/drawingml/2006/main">
               <a:ext uri="{FF2B5EF4-FFF2-40B4-BE49-F238E27FC236}">
-                <a16:creationId xmlns:a16="http://schemas.microsoft.com/office/drawing/2014/main" id="{87ABC30F-363A-4A6C-99AE-5D777A1C011C}"/>
+                <a16:creationId xmlns:a16="http://schemas.microsoft.com/office/drawing/2014/main" id="{F65017BC-9141-4B52-A3EB-E78D691C70DB}"/>
               </a:ext>
             </a:extLst>
           </p:cNvPr>
@@ -8540,7 +8562,7 @@
           <p:cNvPr id="4" name="c3-shape-23">
             <a:extLst xmlns:a="http://schemas.openxmlformats.org/drawingml/2006/main">
               <a:ext uri="{FF2B5EF4-FFF2-40B4-BE49-F238E27FC236}">
-                <a16:creationId xmlns:a16="http://schemas.microsoft.com/office/drawing/2014/main" id="{E8EA7E71-2327-4599-9718-427930AF9556}"/>
+                <a16:creationId xmlns:a16="http://schemas.microsoft.com/office/drawing/2014/main" id="{FCDFFAAE-F606-4B39-A58E-D2340BE51211}"/>
               </a:ext>
             </a:extLst>
           </p:cNvPr>
@@ -8574,7 +8596,7 @@
           <p:cNvPr id="5" name="c3-shape-24">
             <a:extLst xmlns:a="http://schemas.openxmlformats.org/drawingml/2006/main">
               <a:ext uri="{FF2B5EF4-FFF2-40B4-BE49-F238E27FC236}">
-                <a16:creationId xmlns:a16="http://schemas.microsoft.com/office/drawing/2014/main" id="{C0586309-0489-4187-A362-66C0030AC734}"/>
+                <a16:creationId xmlns:a16="http://schemas.microsoft.com/office/drawing/2014/main" id="{4B83EA8F-B42D-4863-A061-DBD26A50946B}"/>
               </a:ext>
             </a:extLst>
           </p:cNvPr>
@@ -8606,7 +8628,7 @@
           <p:cNvPr id="6" name="c3-text-25">
             <a:extLst xmlns:a="http://schemas.openxmlformats.org/drawingml/2006/main">
               <a:ext uri="{FF2B5EF4-FFF2-40B4-BE49-F238E27FC236}">
-                <a16:creationId xmlns:a16="http://schemas.microsoft.com/office/drawing/2014/main" id="{D727E21E-5018-4468-BB05-F8447DFFD9BC}"/>
+                <a16:creationId xmlns:a16="http://schemas.microsoft.com/office/drawing/2014/main" id="{EDE1E3B2-F4DD-4C6A-A268-19DC24AC2616}"/>
               </a:ext>
             </a:extLst>
           </p:cNvPr>
@@ -8663,7 +8685,7 @@
           <p:cNvPr id="7" name="c3-text-26">
             <a:extLst xmlns:a="http://schemas.openxmlformats.org/drawingml/2006/main">
               <a:ext uri="{FF2B5EF4-FFF2-40B4-BE49-F238E27FC236}">
-                <a16:creationId xmlns:a16="http://schemas.microsoft.com/office/drawing/2014/main" id="{B3A1F9CA-AD17-4AB7-91BB-43534B44E550}"/>
+                <a16:creationId xmlns:a16="http://schemas.microsoft.com/office/drawing/2014/main" id="{66AF5198-F9DF-4A24-9308-6FA7C138B3BB}"/>
               </a:ext>
             </a:extLst>
           </p:cNvPr>
@@ -8720,7 +8742,7 @@
           <p:cNvPr id="8" name="c3-shape-27">
             <a:extLst xmlns:a="http://schemas.openxmlformats.org/drawingml/2006/main">
               <a:ext uri="{FF2B5EF4-FFF2-40B4-BE49-F238E27FC236}">
-                <a16:creationId xmlns:a16="http://schemas.microsoft.com/office/drawing/2014/main" id="{C635BF6D-88CC-4A9C-BB58-292C9C5D2069}"/>
+                <a16:creationId xmlns:a16="http://schemas.microsoft.com/office/drawing/2014/main" id="{6966B6EC-11A9-41E5-8A82-823168E06EAD}"/>
               </a:ext>
             </a:extLst>
           </p:cNvPr>
@@ -8754,7 +8776,7 @@
           <p:cNvPr id="9" name="c3-shape-28">
             <a:extLst xmlns:a="http://schemas.openxmlformats.org/drawingml/2006/main">
               <a:ext uri="{FF2B5EF4-FFF2-40B4-BE49-F238E27FC236}">
-                <a16:creationId xmlns:a16="http://schemas.microsoft.com/office/drawing/2014/main" id="{8815B125-B7BD-4181-89C7-16F3B4BC057B}"/>
+                <a16:creationId xmlns:a16="http://schemas.microsoft.com/office/drawing/2014/main" id="{71DA86C5-24B5-414B-8DBA-3ED7CB691D99}"/>
               </a:ext>
             </a:extLst>
           </p:cNvPr>
@@ -8786,7 +8808,7 @@
           <p:cNvPr id="10" name="c3-text-29">
             <a:extLst xmlns:a="http://schemas.openxmlformats.org/drawingml/2006/main">
               <a:ext uri="{FF2B5EF4-FFF2-40B4-BE49-F238E27FC236}">
-                <a16:creationId xmlns:a16="http://schemas.microsoft.com/office/drawing/2014/main" id="{7593FCE5-EBD8-4010-A7E0-B25CBC394B99}"/>
+                <a16:creationId xmlns:a16="http://schemas.microsoft.com/office/drawing/2014/main" id="{ADC715C7-BB6F-479E-BBD2-7D9E84E99098}"/>
               </a:ext>
             </a:extLst>
           </p:cNvPr>
@@ -8843,7 +8865,7 @@
           <p:cNvPr id="11" name="c3-text-30">
             <a:extLst xmlns:a="http://schemas.openxmlformats.org/drawingml/2006/main">
               <a:ext uri="{FF2B5EF4-FFF2-40B4-BE49-F238E27FC236}">
-                <a16:creationId xmlns:a16="http://schemas.microsoft.com/office/drawing/2014/main" id="{C7BEDC83-8455-4AC4-8F45-409C877B7903}"/>
+                <a16:creationId xmlns:a16="http://schemas.microsoft.com/office/drawing/2014/main" id="{FC680E9E-0AE6-4DEA-A319-62F4D317F4D3}"/>
               </a:ext>
             </a:extLst>
           </p:cNvPr>
@@ -8900,7 +8922,7 @@
           <p:cNvPr id="12" name="c3-text-31">
             <a:extLst xmlns:a="http://schemas.openxmlformats.org/drawingml/2006/main">
               <a:ext uri="{FF2B5EF4-FFF2-40B4-BE49-F238E27FC236}">
-                <a16:creationId xmlns:a16="http://schemas.microsoft.com/office/drawing/2014/main" id="{2B4BCF08-A8B7-4878-B76D-3D8E0BCD7C6B}"/>
+                <a16:creationId xmlns:a16="http://schemas.microsoft.com/office/drawing/2014/main" id="{A5E33A75-6ABE-4BF5-83FE-A384E9ECA5BD}"/>
               </a:ext>
             </a:extLst>
           </p:cNvPr>
@@ -8955,10 +8977,10 @@
       <p:sp>
         <p:nvSpPr>
           <p:cNvPr id="13" name="c3-text-32">
-            <a:hlinkClick xmlns:r="http://schemas.openxmlformats.org/officeDocument/2006/relationships" xmlns:a="http://schemas.openxmlformats.org/drawingml/2006/main" r:id="R638e7fd2fbe046c5"/>
-            <a:extLst xmlns:a="http://schemas.openxmlformats.org/drawingml/2006/main">
-              <a:ext uri="{FF2B5EF4-FFF2-40B4-BE49-F238E27FC236}">
-                <a16:creationId xmlns:a16="http://schemas.microsoft.com/office/drawing/2014/main" id="{8279F861-B922-4D0B-AD2F-362A6EB2475E}"/>
+            <a:hlinkClick xmlns:r="http://schemas.openxmlformats.org/officeDocument/2006/relationships" xmlns:a="http://schemas.openxmlformats.org/drawingml/2006/main" r:id="Rcf436243ca0a4851"/>
+            <a:extLst xmlns:a="http://schemas.openxmlformats.org/drawingml/2006/main">
+              <a:ext uri="{FF2B5EF4-FFF2-40B4-BE49-F238E27FC236}">
+                <a16:creationId xmlns:a16="http://schemas.microsoft.com/office/drawing/2014/main" id="{29904F1D-841B-4960-BE4A-36A04024E4D9}"/>
               </a:ext>
             </a:extLst>
           </p:cNvPr>
@@ -9015,7 +9037,7 @@
           <p:cNvPr id="14" name="c3-text-154">
             <a:extLst xmlns:a="http://schemas.openxmlformats.org/drawingml/2006/main">
               <a:ext uri="{FF2B5EF4-FFF2-40B4-BE49-F238E27FC236}">
-                <a16:creationId xmlns:a16="http://schemas.microsoft.com/office/drawing/2014/main" id="{BE68270A-27A8-4B55-B954-0348D270A6E4}"/>
+                <a16:creationId xmlns:a16="http://schemas.microsoft.com/office/drawing/2014/main" id="{12594D95-B868-4BE9-ACD1-E604CD288076}"/>
               </a:ext>
             </a:extLst>
           </p:cNvPr>
@@ -9070,7 +9092,7 @@
     </p:spTree>
     <p:extLst>
       <p:ext uri="{BB962C8B-B14F-4D97-AF65-F5344CB8AC3E}">
-        <p14:creationId xmlns:p14="http://schemas.microsoft.com/office/powerpoint/2010/main" val="105507948"/>
+        <p14:creationId xmlns:p14="http://schemas.microsoft.com/office/powerpoint/2010/main" val="263660646"/>
       </p:ext>
     </p:extLst>
   </p:cSld>
@@ -9101,7 +9123,7 @@
           <p:cNvPr id="9" name="c3-text-33">
             <a:extLst xmlns:a="http://schemas.openxmlformats.org/drawingml/2006/main">
               <a:ext uri="{FF2B5EF4-FFF2-40B4-BE49-F238E27FC236}">
-                <a16:creationId xmlns:a16="http://schemas.microsoft.com/office/drawing/2014/main" id="{3D2B5709-5A78-4EC2-8808-86CF045261AF}"/>
+                <a16:creationId xmlns:a16="http://schemas.microsoft.com/office/drawing/2014/main" id="{832C23B4-D596-4C8F-93F9-E396AF166E26}"/>
               </a:ext>
             </a:extLst>
           </p:cNvPr>
@@ -9158,7 +9180,7 @@
           <p:cNvPr id="2" name="c3-text-34">
             <a:extLst xmlns:a="http://schemas.openxmlformats.org/drawingml/2006/main">
               <a:ext uri="{FF2B5EF4-FFF2-40B4-BE49-F238E27FC236}">
-                <a16:creationId xmlns:a16="http://schemas.microsoft.com/office/drawing/2014/main" id="{D415B6CD-7010-4000-BBFC-E717516A9BC7}"/>
+                <a16:creationId xmlns:a16="http://schemas.microsoft.com/office/drawing/2014/main" id="{CFCEC912-70E3-4178-880D-30E07EBBE7A2}"/>
               </a:ext>
             </a:extLst>
           </p:cNvPr>
@@ -9215,7 +9237,7 @@
           <p:cNvPr id="3" name="c3-text-35">
             <a:extLst xmlns:a="http://schemas.openxmlformats.org/drawingml/2006/main">
               <a:ext uri="{FF2B5EF4-FFF2-40B4-BE49-F238E27FC236}">
-                <a16:creationId xmlns:a16="http://schemas.microsoft.com/office/drawing/2014/main" id="{C37F7DE6-63E9-4994-A4A5-412F99A78FE5}"/>
+                <a16:creationId xmlns:a16="http://schemas.microsoft.com/office/drawing/2014/main" id="{BAC0EB16-9F36-4D7C-97E7-02E3B3CE025B}"/>
               </a:ext>
             </a:extLst>
           </p:cNvPr>
@@ -9272,23 +9294,23 @@
           <p:cNvPr id="4" name="c3-shape-36">
             <a:extLst xmlns:a="http://schemas.openxmlformats.org/drawingml/2006/main">
               <a:ext uri="{FF2B5EF4-FFF2-40B4-BE49-F238E27FC236}">
-                <a16:creationId xmlns:a16="http://schemas.microsoft.com/office/drawing/2014/main" id="{1FA2ED48-5B66-4F62-9806-3E5881E8F1C6}"/>
-              </a:ext>
-            </a:extLst>
-          </p:cNvPr>
-          <p:cNvSpPr>
-            <a:spLocks xmlns:a="http://schemas.openxmlformats.org/drawingml/2006/main" noGrp="1"/>
-          </p:cNvSpPr>
-          <p:nvPr/>
-        </p:nvSpPr>
-        <p:spPr>
-          <a:xfrm xmlns:a="http://schemas.openxmlformats.org/drawingml/2006/main">
-            <a:off x="609600" y="1524000"/>
-            <a:ext cx="7924800" cy="1866900"/>
+                <a16:creationId xmlns:a16="http://schemas.microsoft.com/office/drawing/2014/main" id="{6CB321D3-2049-44ED-9097-9E748BCF0755}"/>
+              </a:ext>
+            </a:extLst>
+          </p:cNvPr>
+          <p:cNvSpPr>
+            <a:spLocks xmlns:a="http://schemas.openxmlformats.org/drawingml/2006/main" noGrp="1"/>
+          </p:cNvSpPr>
+          <p:nvPr/>
+        </p:nvSpPr>
+        <p:spPr>
+          <a:xfrm xmlns:a="http://schemas.openxmlformats.org/drawingml/2006/main">
+            <a:off x="609600" y="1428750"/>
+            <a:ext cx="7924800" cy="2667000"/>
           </a:xfrm>
           <a:prstGeom xmlns:a="http://schemas.openxmlformats.org/drawingml/2006/main" prst="roundRect">
             <a:avLst>
-              <a:gd name="adj" fmla="val 4082"/>
+              <a:gd name="adj" fmla="val 2857"/>
             </a:avLst>
           </a:prstGeom>
           <a:solidFill xmlns:a="http://schemas.openxmlformats.org/drawingml/2006/main">
@@ -9306,19 +9328,19 @@
           <p:cNvPr id="5" name="c3-text-37">
             <a:extLst xmlns:a="http://schemas.openxmlformats.org/drawingml/2006/main">
               <a:ext uri="{FF2B5EF4-FFF2-40B4-BE49-F238E27FC236}">
-                <a16:creationId xmlns:a16="http://schemas.microsoft.com/office/drawing/2014/main" id="{46D05A82-89D5-47A2-B9B1-D8A96CE627D8}"/>
-              </a:ext>
-            </a:extLst>
-          </p:cNvPr>
-          <p:cNvSpPr>
-            <a:spLocks xmlns:a="http://schemas.openxmlformats.org/drawingml/2006/main" noGrp="1"/>
-          </p:cNvSpPr>
-          <p:nvPr/>
-        </p:nvSpPr>
-        <p:spPr>
-          <a:xfrm xmlns:a="http://schemas.openxmlformats.org/drawingml/2006/main">
-            <a:off x="781050" y="1657350"/>
-            <a:ext cx="7581900" cy="1600200"/>
+                <a16:creationId xmlns:a16="http://schemas.microsoft.com/office/drawing/2014/main" id="{F7AF823A-6532-4CC4-88D1-EEEC6A1B1849}"/>
+              </a:ext>
+            </a:extLst>
+          </p:cNvPr>
+          <p:cNvSpPr>
+            <a:spLocks xmlns:a="http://schemas.openxmlformats.org/drawingml/2006/main" noGrp="1"/>
+          </p:cNvSpPr>
+          <p:nvPr/>
+        </p:nvSpPr>
+        <p:spPr>
+          <a:xfrm xmlns:a="http://schemas.openxmlformats.org/drawingml/2006/main">
+            <a:off x="781050" y="1562100"/>
+            <a:ext cx="7581900" cy="2400300"/>
           </a:xfrm>
           <a:prstGeom xmlns:a="http://schemas.openxmlformats.org/drawingml/2006/main" prst="rect">
             <a:avLst/>
@@ -9335,7 +9357,7 @@
           <a:lstStyle xmlns:a="http://schemas.openxmlformats.org/drawingml/2006/main"/>
           <a:p xmlns:a="http://schemas.openxmlformats.org/drawingml/2006/main">
             <a:pPr>
-              <a:defRPr sz="1500" b="0">
+              <a:defRPr sz="1350" b="0">
                 <a:solidFill>
                   <a:srgbClr val="BAC9DD"/>
                 </a:solidFill>
@@ -9345,7 +9367,7 @@
               </a:defRPr>
             </a:pPr>
             <a:r>
-              <a:rPr sz="1500" b="0">
+              <a:rPr sz="1350" b="0">
                 <a:solidFill>
                   <a:srgbClr val="BAC9DD"/>
                 </a:solidFill>
@@ -9353,10 +9375,10 @@
                 <a:ea typeface="Consolas"/>
                 <a:cs typeface="Consolas"/>
               </a:rPr>
-              <a:t>system = </a:t>
-            </a:r>
-            <a:r>
-              <a:rPr sz="1500" b="0">
+              <a:t>prompt = ChatPromptTemplate.</a:t>
+            </a:r>
+            <a:r>
+              <a:rPr sz="1350" b="0">
                 <a:solidFill>
                   <a:srgbClr val="82AAFF"/>
                 </a:solidFill>
@@ -9364,10 +9386,10 @@
                 <a:ea typeface="Consolas"/>
                 <a:cs typeface="Consolas"/>
               </a:rPr>
-              <a:t>SystemMessage</a:t>
-            </a:r>
-            <a:r>
-              <a:rPr sz="1500" b="0">
+              <a:t>from_messages</a:t>
+            </a:r>
+            <a:r>
+              <a:rPr sz="1350" b="0">
                 <a:solidFill>
                   <a:srgbClr val="BAC9DD"/>
                 </a:solidFill>
@@ -9375,12 +9397,57 @@
                 <a:ea typeface="Consolas"/>
                 <a:cs typeface="Consolas"/>
               </a:rPr>
+              <a:t>([</a:t>
+            </a:r>
+          </a:p>
+          <a:p xmlns:a="http://schemas.openxmlformats.org/drawingml/2006/main">
+            <a:pPr>
+              <a:defRPr sz="1350" b="0">
+                <a:solidFill>
+                  <a:srgbClr val="BAC9DD"/>
+                </a:solidFill>
+                <a:latin typeface="Consolas"/>
+                <a:ea typeface="Consolas"/>
+                <a:cs typeface="Consolas"/>
+              </a:defRPr>
+            </a:pPr>
+            <a:r>
+              <a:rPr sz="1350" b="0">
+                <a:solidFill>
+                  <a:srgbClr val="BAC9DD"/>
+                </a:solidFill>
+                <a:latin typeface="Consolas"/>
+                <a:ea typeface="Consolas"/>
+                <a:cs typeface="Consolas"/>
+              </a:rPr>
+              <a:t>    SystemMessagePromptTemplate.</a:t>
+            </a:r>
+            <a:r>
+              <a:rPr sz="1350" b="0">
+                <a:solidFill>
+                  <a:srgbClr val="82AAFF"/>
+                </a:solidFill>
+                <a:latin typeface="Consolas"/>
+                <a:ea typeface="Consolas"/>
+                <a:cs typeface="Consolas"/>
+              </a:rPr>
+              <a:t>from_template</a:t>
+            </a:r>
+            <a:r>
+              <a:rPr sz="1350" b="0">
+                <a:solidFill>
+                  <a:srgbClr val="BAC9DD"/>
+                </a:solidFill>
+                <a:latin typeface="Consolas"/>
+                <a:ea typeface="Consolas"/>
+                <a:cs typeface="Consolas"/>
+              </a:rPr>
               <a:t>(</a:t>
             </a:r>
           </a:p>
           <a:p xmlns:a="http://schemas.openxmlformats.org/drawingml/2006/main">
             <a:pPr>
-              <a:defRPr sz="1500" b="0">
+              <a:defRPr sz="1350" b="0">
                 <a:solidFill>
                   <a:srgbClr val="BAC9DD"/>
                 </a:solidFill>
@@ -9390,7 +9457,7 @@
               </a:defRPr>
             </a:pPr>
             <a:r>
-              <a:rPr sz="1500" b="0">
+              <a:rPr sz="1350" b="0">
                 <a:solidFill>
                   <a:srgbClr val="BAC9DD"/>
                 </a:solidFill>
@@ -9398,10 +9465,77 @@
                 <a:ea typeface="Consolas"/>
                 <a:cs typeface="Consolas"/>
               </a:rPr>
+              <a:t>        </a:t>
+            </a:r>
+            <a:r>
+              <a:rPr sz="1350" b="0">
+                <a:solidFill>
+                  <a:srgbClr val="B9DA8B"/>
+                </a:solidFill>
+                <a:latin typeface="Consolas"/>
+                <a:ea typeface="Consolas"/>
+                <a:cs typeface="Consolas"/>
+              </a:rPr>
+              <a:t>"You are a museum guide. Reply briefly."</a:t>
+            </a:r>
+            <a:r>
+              <a:rPr sz="1350" b="0">
+                <a:solidFill>
+                  <a:srgbClr val="BAC9DD"/>
+                </a:solidFill>
+                <a:latin typeface="Consolas"/>
+                <a:ea typeface="Consolas"/>
+                <a:cs typeface="Consolas"/>
+              </a:rPr>
+              <a:t>),</a:t>
+            </a:r>
+          </a:p>
+          <a:p xmlns:a="http://schemas.openxmlformats.org/drawingml/2006/main">
+            <a:pPr>
+              <a:defRPr sz="1350" b="0">
+                <a:solidFill>
+                  <a:srgbClr val="BAC9DD"/>
+                </a:solidFill>
+                <a:latin typeface="Consolas"/>
+                <a:ea typeface="Consolas"/>
+                <a:cs typeface="Consolas"/>
+              </a:defRPr>
+            </a:pPr>
+            <a:r>
+              <a:rPr sz="1350" b="0">
+                <a:solidFill>
+                  <a:srgbClr val="BAC9DD"/>
+                </a:solidFill>
+                <a:latin typeface="Consolas"/>
+                <a:ea typeface="Consolas"/>
+                <a:cs typeface="Consolas"/>
+              </a:rPr>
               <a:t>    </a:t>
             </a:r>
             <a:r>
-              <a:rPr sz="1500" b="0">
+              <a:rPr sz="1350" b="0">
+                <a:solidFill>
+                  <a:srgbClr val="82AAFF"/>
+                </a:solidFill>
+                <a:latin typeface="Consolas"/>
+                <a:ea typeface="Consolas"/>
+                <a:cs typeface="Consolas"/>
+              </a:rPr>
+              <a:t>MessagesPlaceholder</a:t>
+            </a:r>
+            <a:r>
+              <a:rPr sz="1350" b="0">
+                <a:solidFill>
+                  <a:srgbClr val="BAC9DD"/>
+                </a:solidFill>
+                <a:latin typeface="Consolas"/>
+                <a:ea typeface="Consolas"/>
+                <a:cs typeface="Consolas"/>
+              </a:rPr>
+              <a:t>(</a:t>
+            </a:r>
+            <a:r>
+              <a:rPr sz="1350" b="0">
                 <a:solidFill>
                   <a:srgbClr val="B9DA8B"/>
                 </a:solidFill>
@@ -9409,10 +9543,10 @@
                 <a:ea typeface="Consolas"/>
                 <a:cs typeface="Consolas"/>
               </a:rPr>
-              <a:t>"You are a friendly museum guide. Reply briefly."</a:t>
-            </a:r>
-            <a:r>
-              <a:rPr sz="1500" b="0">
+              <a:t>"messages"</a:t>
+            </a:r>
+            <a:r>
+              <a:rPr sz="1350" b="0">
                 <a:solidFill>
                   <a:srgbClr val="BAC9DD"/>
                 </a:solidFill>
@@ -9420,7 +9554,30 @@
                 <a:ea typeface="Consolas"/>
                 <a:cs typeface="Consolas"/>
               </a:rPr>
-              <a:t>)</a:t>
+              <a:t>),</a:t>
+            </a:r>
+          </a:p>
+          <a:p xmlns:a="http://schemas.openxmlformats.org/drawingml/2006/main">
+            <a:pPr>
+              <a:defRPr sz="1350" b="0">
+                <a:solidFill>
+                  <a:srgbClr val="BAC9DD"/>
+                </a:solidFill>
+                <a:latin typeface="Consolas"/>
+                <a:ea typeface="Consolas"/>
+                <a:cs typeface="Consolas"/>
+              </a:defRPr>
+            </a:pPr>
+            <a:r>
+              <a:rPr sz="1350" b="0">
+                <a:solidFill>
+                  <a:srgbClr val="BAC9DD"/>
+                </a:solidFill>
+                <a:latin typeface="Consolas"/>
+                <a:ea typeface="Consolas"/>
+                <a:cs typeface="Consolas"/>
+              </a:rPr>
+              <a:t>])</a:t>
             </a:r>
           </a:p>
           <a:p xmlns:a="http://schemas.openxmlformats.org/drawingml/2006/main">
@@ -9430,7 +9587,7 @@
           </a:p>
           <a:p xmlns:a="http://schemas.openxmlformats.org/drawingml/2006/main">
             <a:pPr>
-              <a:defRPr sz="1500" b="0">
+              <a:defRPr sz="1350" b="0">
                 <a:solidFill>
                   <a:srgbClr val="BAC9DD"/>
                 </a:solidFill>
@@ -9440,7 +9597,7 @@
               </a:defRPr>
             </a:pPr>
             <a:r>
-              <a:rPr sz="1500" b="0">
+              <a:rPr sz="1350" b="0">
                 <a:solidFill>
                   <a:srgbClr val="CBA6F7"/>
                 </a:solidFill>
@@ -9451,7 +9608,7 @@
               <a:t>def</a:t>
             </a:r>
             <a:r>
-              <a:rPr sz="1500" b="0">
+              <a:rPr sz="1350" b="0">
                 <a:solidFill>
                   <a:srgbClr val="BAC9DD"/>
                 </a:solidFill>
@@ -9462,7 +9619,7 @@
               <a:t> </a:t>
             </a:r>
             <a:r>
-              <a:rPr sz="1500" b="0">
+              <a:rPr sz="1350" b="0">
                 <a:solidFill>
                   <a:srgbClr val="82AAFF"/>
                 </a:solidFill>
@@ -9473,7 +9630,7 @@
               <a:t>chatbot</a:t>
             </a:r>
             <a:r>
-              <a:rPr sz="1500" b="0">
+              <a:rPr sz="1350" b="0">
                 <a:solidFill>
                   <a:srgbClr val="BAC9DD"/>
                 </a:solidFill>
@@ -9486,7 +9643,7 @@
           </a:p>
           <a:p xmlns:a="http://schemas.openxmlformats.org/drawingml/2006/main">
             <a:pPr>
-              <a:defRPr sz="1500" b="0">
+              <a:defRPr sz="1350" b="0">
                 <a:solidFill>
                   <a:srgbClr val="BAC9DD"/>
                 </a:solidFill>
@@ -9496,7 +9653,7 @@
               </a:defRPr>
             </a:pPr>
             <a:r>
-              <a:rPr sz="1500" b="0">
+              <a:rPr sz="1350" b="0">
                 <a:solidFill>
                   <a:srgbClr val="BAC9DD"/>
                 </a:solidFill>
@@ -9504,10 +9661,10 @@
                 <a:ea typeface="Consolas"/>
                 <a:cs typeface="Consolas"/>
               </a:rPr>
-              <a:t>    reply = llm.</a:t>
-            </a:r>
-            <a:r>
-              <a:rPr sz="1500" b="0">
+              <a:t>    messages = prompt.</a:t>
+            </a:r>
+            <a:r>
+              <a:rPr sz="1350" b="0">
                 <a:solidFill>
                   <a:srgbClr val="82AAFF"/>
                 </a:solidFill>
@@ -9515,10 +9672,121 @@
                 <a:ea typeface="Consolas"/>
                 <a:cs typeface="Consolas"/>
               </a:rPr>
+              <a:t>format_messages</a:t>
+            </a:r>
+            <a:r>
+              <a:rPr sz="1350" b="0">
+                <a:solidFill>
+                  <a:srgbClr val="BAC9DD"/>
+                </a:solidFill>
+                <a:latin typeface="Consolas"/>
+                <a:ea typeface="Consolas"/>
+                <a:cs typeface="Consolas"/>
+              </a:rPr>
+              <a:t>(messages=state[</a:t>
+            </a:r>
+            <a:r>
+              <a:rPr sz="1350" b="0">
+                <a:solidFill>
+                  <a:srgbClr val="B9DA8B"/>
+                </a:solidFill>
+                <a:latin typeface="Consolas"/>
+                <a:ea typeface="Consolas"/>
+                <a:cs typeface="Consolas"/>
+              </a:rPr>
+              <a:t>"messages"</a:t>
+            </a:r>
+            <a:r>
+              <a:rPr sz="1350" b="0">
+                <a:solidFill>
+                  <a:srgbClr val="BAC9DD"/>
+                </a:solidFill>
+                <a:latin typeface="Consolas"/>
+                <a:ea typeface="Consolas"/>
+                <a:cs typeface="Consolas"/>
+              </a:rPr>
+              <a:t>])</a:t>
+            </a:r>
+          </a:p>
+          <a:p xmlns:a="http://schemas.openxmlformats.org/drawingml/2006/main">
+            <a:pPr>
+              <a:defRPr sz="1350" b="0">
+                <a:solidFill>
+                  <a:srgbClr val="BAC9DD"/>
+                </a:solidFill>
+                <a:latin typeface="Consolas"/>
+                <a:ea typeface="Consolas"/>
+                <a:cs typeface="Consolas"/>
+              </a:defRPr>
+            </a:pPr>
+            <a:r>
+              <a:rPr sz="1350" b="0">
+                <a:solidFill>
+                  <a:srgbClr val="BAC9DD"/>
+                </a:solidFill>
+                <a:latin typeface="Consolas"/>
+                <a:ea typeface="Consolas"/>
+                <a:cs typeface="Consolas"/>
+              </a:rPr>
+              <a:t>    </a:t>
+            </a:r>
+            <a:r>
+              <a:rPr sz="1350" b="0">
+                <a:solidFill>
+                  <a:srgbClr val="CBA6F7"/>
+                </a:solidFill>
+                <a:latin typeface="Consolas"/>
+                <a:ea typeface="Consolas"/>
+                <a:cs typeface="Consolas"/>
+              </a:rPr>
+              <a:t>return</a:t>
+            </a:r>
+            <a:r>
+              <a:rPr sz="1350" b="0">
+                <a:solidFill>
+                  <a:srgbClr val="BAC9DD"/>
+                </a:solidFill>
+                <a:latin typeface="Consolas"/>
+                <a:ea typeface="Consolas"/>
+                <a:cs typeface="Consolas"/>
+              </a:rPr>
+              <a:t> {</a:t>
+            </a:r>
+            <a:r>
+              <a:rPr sz="1350" b="0">
+                <a:solidFill>
+                  <a:srgbClr val="B9DA8B"/>
+                </a:solidFill>
+                <a:latin typeface="Consolas"/>
+                <a:ea typeface="Consolas"/>
+                <a:cs typeface="Consolas"/>
+              </a:rPr>
+              <a:t>"messages"</a:t>
+            </a:r>
+            <a:r>
+              <a:rPr sz="1350" b="0">
+                <a:solidFill>
+                  <a:srgbClr val="BAC9DD"/>
+                </a:solidFill>
+                <a:latin typeface="Consolas"/>
+                <a:ea typeface="Consolas"/>
+                <a:cs typeface="Consolas"/>
+              </a:rPr>
+              <a:t>: [llm.</a:t>
+            </a:r>
+            <a:r>
+              <a:rPr sz="1350" b="0">
+                <a:solidFill>
+                  <a:srgbClr val="82AAFF"/>
+                </a:solidFill>
+                <a:latin typeface="Consolas"/>
+                <a:ea typeface="Consolas"/>
+                <a:cs typeface="Consolas"/>
+              </a:rPr>
               <a:t>invoke</a:t>
             </a:r>
             <a:r>
-              <a:rPr sz="1500" b="0">
+              <a:rPr sz="1350" b="0">
                 <a:solidFill>
                   <a:srgbClr val="BAC9DD"/>
                 </a:solidFill>
@@ -9526,96 +9794,7 @@
                 <a:ea typeface="Consolas"/>
                 <a:cs typeface="Consolas"/>
               </a:rPr>
-              <a:t>([system] + state[</a:t>
-            </a:r>
-            <a:r>
-              <a:rPr sz="1500" b="0">
-                <a:solidFill>
-                  <a:srgbClr val="B9DA8B"/>
-                </a:solidFill>
-                <a:latin typeface="Consolas"/>
-                <a:ea typeface="Consolas"/>
-                <a:cs typeface="Consolas"/>
-              </a:rPr>
-              <a:t>"messages"</a:t>
-            </a:r>
-            <a:r>
-              <a:rPr sz="1500" b="0">
-                <a:solidFill>
-                  <a:srgbClr val="BAC9DD"/>
-                </a:solidFill>
-                <a:latin typeface="Consolas"/>
-                <a:ea typeface="Consolas"/>
-                <a:cs typeface="Consolas"/>
-              </a:rPr>
-              <a:t>])</a:t>
-            </a:r>
-          </a:p>
-          <a:p xmlns:a="http://schemas.openxmlformats.org/drawingml/2006/main">
-            <a:pPr>
-              <a:defRPr sz="1500" b="0">
-                <a:solidFill>
-                  <a:srgbClr val="BAC9DD"/>
-                </a:solidFill>
-                <a:latin typeface="Consolas"/>
-                <a:ea typeface="Consolas"/>
-                <a:cs typeface="Consolas"/>
-              </a:defRPr>
-            </a:pPr>
-            <a:r>
-              <a:rPr sz="1500" b="0">
-                <a:solidFill>
-                  <a:srgbClr val="BAC9DD"/>
-                </a:solidFill>
-                <a:latin typeface="Consolas"/>
-                <a:ea typeface="Consolas"/>
-                <a:cs typeface="Consolas"/>
-              </a:rPr>
-              <a:t>    </a:t>
-            </a:r>
-            <a:r>
-              <a:rPr sz="1500" b="0">
-                <a:solidFill>
-                  <a:srgbClr val="CBA6F7"/>
-                </a:solidFill>
-                <a:latin typeface="Consolas"/>
-                <a:ea typeface="Consolas"/>
-                <a:cs typeface="Consolas"/>
-              </a:rPr>
-              <a:t>return</a:t>
-            </a:r>
-            <a:r>
-              <a:rPr sz="1500" b="0">
-                <a:solidFill>
-                  <a:srgbClr val="BAC9DD"/>
-                </a:solidFill>
-                <a:latin typeface="Consolas"/>
-                <a:ea typeface="Consolas"/>
-                <a:cs typeface="Consolas"/>
-              </a:rPr>
-              <a:t> {</a:t>
-            </a:r>
-            <a:r>
-              <a:rPr sz="1500" b="0">
-                <a:solidFill>
-                  <a:srgbClr val="B9DA8B"/>
-                </a:solidFill>
-                <a:latin typeface="Consolas"/>
-                <a:ea typeface="Consolas"/>
-                <a:cs typeface="Consolas"/>
-              </a:rPr>
-              <a:t>"messages"</a:t>
-            </a:r>
-            <a:r>
-              <a:rPr sz="1500" b="0">
-                <a:solidFill>
-                  <a:srgbClr val="BAC9DD"/>
-                </a:solidFill>
-                <a:latin typeface="Consolas"/>
-                <a:ea typeface="Consolas"/>
-                <a:cs typeface="Consolas"/>
-              </a:rPr>
-              <a:t>: [reply]}</a:t>
+              <a:t>(messages)]}</a:t>
             </a:r>
           </a:p>
         </p:txBody>
@@ -9625,7 +9804,7 @@
           <p:cNvPr id="6" name="c3-shape-38">
             <a:extLst xmlns:a="http://schemas.openxmlformats.org/drawingml/2006/main">
               <a:ext uri="{FF2B5EF4-FFF2-40B4-BE49-F238E27FC236}">
-                <a16:creationId xmlns:a16="http://schemas.microsoft.com/office/drawing/2014/main" id="{6583DD5A-4315-43C4-88A9-E2C7C80AD0F5}"/>
+                <a16:creationId xmlns:a16="http://schemas.microsoft.com/office/drawing/2014/main" id="{F7DC09F4-754C-48CF-9648-63B53892250E}"/>
               </a:ext>
             </a:extLst>
           </p:cNvPr>
@@ -9659,7 +9838,7 @@
           <p:cNvPr id="7" name="c3-text-39">
             <a:extLst xmlns:a="http://schemas.openxmlformats.org/drawingml/2006/main">
               <a:ext uri="{FF2B5EF4-FFF2-40B4-BE49-F238E27FC236}">
-                <a16:creationId xmlns:a16="http://schemas.microsoft.com/office/drawing/2014/main" id="{363FD1BD-3E6C-44E9-9DE3-192B3FDD458C}"/>
+                <a16:creationId xmlns:a16="http://schemas.microsoft.com/office/drawing/2014/main" id="{AD2D4166-A0A8-4496-86CE-71D0623D88D0}"/>
               </a:ext>
             </a:extLst>
           </p:cNvPr>
@@ -9716,7 +9895,7 @@
           <p:cNvPr id="8" name="c3-text-155">
             <a:extLst xmlns:a="http://schemas.openxmlformats.org/drawingml/2006/main">
               <a:ext uri="{FF2B5EF4-FFF2-40B4-BE49-F238E27FC236}">
-                <a16:creationId xmlns:a16="http://schemas.microsoft.com/office/drawing/2014/main" id="{840E283A-1021-4F63-8411-056C982FB961}"/>
+                <a16:creationId xmlns:a16="http://schemas.microsoft.com/office/drawing/2014/main" id="{D3868B5D-3E7F-4DA0-931D-C6EF70F48929}"/>
               </a:ext>
             </a:extLst>
           </p:cNvPr>
@@ -9771,7 +9950,7 @@
     </p:spTree>
     <p:extLst>
       <p:ext uri="{BB962C8B-B14F-4D97-AF65-F5344CB8AC3E}">
-        <p14:creationId xmlns:p14="http://schemas.microsoft.com/office/powerpoint/2010/main" val="502436359"/>
+        <p14:creationId xmlns:p14="http://schemas.microsoft.com/office/powerpoint/2010/main" val="451597660"/>
       </p:ext>
     </p:extLst>
   </p:cSld>
@@ -9802,7 +9981,7 @@
           <p:cNvPr id="17" name="c3-text-40">
             <a:extLst xmlns:a="http://schemas.openxmlformats.org/drawingml/2006/main">
               <a:ext uri="{FF2B5EF4-FFF2-40B4-BE49-F238E27FC236}">
-                <a16:creationId xmlns:a16="http://schemas.microsoft.com/office/drawing/2014/main" id="{1FD036C7-12DA-4285-9C15-BC5FCA3FE1D4}"/>
+                <a16:creationId xmlns:a16="http://schemas.microsoft.com/office/drawing/2014/main" id="{7BE8939C-7B45-4F26-9806-F91BB35DF743}"/>
               </a:ext>
             </a:extLst>
           </p:cNvPr>
@@ -9859,7 +10038,7 @@
           <p:cNvPr id="2" name="c3-text-41">
             <a:extLst xmlns:a="http://schemas.openxmlformats.org/drawingml/2006/main">
               <a:ext uri="{FF2B5EF4-FFF2-40B4-BE49-F238E27FC236}">
-                <a16:creationId xmlns:a16="http://schemas.microsoft.com/office/drawing/2014/main" id="{B1CFE39A-49A5-4E49-8591-CEE1EC7C48D7}"/>
+                <a16:creationId xmlns:a16="http://schemas.microsoft.com/office/drawing/2014/main" id="{A1C8F3CD-FD19-44DF-9538-7D45A607ABE3}"/>
               </a:ext>
             </a:extLst>
           </p:cNvPr>
@@ -9916,7 +10095,7 @@
           <p:cNvPr id="3" name="c3-text-42">
             <a:extLst xmlns:a="http://schemas.openxmlformats.org/drawingml/2006/main">
               <a:ext uri="{FF2B5EF4-FFF2-40B4-BE49-F238E27FC236}">
-                <a16:creationId xmlns:a16="http://schemas.microsoft.com/office/drawing/2014/main" id="{C052E742-2B5F-432C-A76A-C40B67EBF220}"/>
+                <a16:creationId xmlns:a16="http://schemas.microsoft.com/office/drawing/2014/main" id="{99A799A0-B69C-48F1-838D-060CC6E76F4B}"/>
               </a:ext>
             </a:extLst>
           </p:cNvPr>
@@ -9973,7 +10152,7 @@
           <p:cNvPr id="4" name="c3-shape-43">
             <a:extLst xmlns:a="http://schemas.openxmlformats.org/drawingml/2006/main">
               <a:ext uri="{FF2B5EF4-FFF2-40B4-BE49-F238E27FC236}">
-                <a16:creationId xmlns:a16="http://schemas.microsoft.com/office/drawing/2014/main" id="{8F070CFF-B6D5-434E-9207-583D8F9DAB87}"/>
+                <a16:creationId xmlns:a16="http://schemas.microsoft.com/office/drawing/2014/main" id="{6F181B8A-1A78-4103-8D6C-B14AAD289B64}"/>
               </a:ext>
             </a:extLst>
           </p:cNvPr>
@@ -10007,7 +10186,7 @@
           <p:cNvPr id="5" name="c3-text-44">
             <a:extLst xmlns:a="http://schemas.openxmlformats.org/drawingml/2006/main">
               <a:ext uri="{FF2B5EF4-FFF2-40B4-BE49-F238E27FC236}">
-                <a16:creationId xmlns:a16="http://schemas.microsoft.com/office/drawing/2014/main" id="{46EFCB3F-099D-4D72-96DF-A1E4D3E86BD8}"/>
+                <a16:creationId xmlns:a16="http://schemas.microsoft.com/office/drawing/2014/main" id="{62796A58-B34F-42E7-901E-4ACBDD52F45D}"/>
               </a:ext>
             </a:extLst>
           </p:cNvPr>
@@ -10064,7 +10243,7 @@
           <p:cNvPr id="6" name="c3-shape-45">
             <a:extLst xmlns:a="http://schemas.openxmlformats.org/drawingml/2006/main">
               <a:ext uri="{FF2B5EF4-FFF2-40B4-BE49-F238E27FC236}">
-                <a16:creationId xmlns:a16="http://schemas.microsoft.com/office/drawing/2014/main" id="{52BFE05A-25D8-4C66-B3CB-9B61DD6EDB4F}"/>
+                <a16:creationId xmlns:a16="http://schemas.microsoft.com/office/drawing/2014/main" id="{2EE84E5B-6940-46BE-B190-C061CF1B4EF6}"/>
               </a:ext>
             </a:extLst>
           </p:cNvPr>
@@ -10096,7 +10275,7 @@
           <p:cNvPr id="7" name="c3-shape-46">
             <a:extLst xmlns:a="http://schemas.openxmlformats.org/drawingml/2006/main">
               <a:ext uri="{FF2B5EF4-FFF2-40B4-BE49-F238E27FC236}">
-                <a16:creationId xmlns:a16="http://schemas.microsoft.com/office/drawing/2014/main" id="{6872CA35-744B-41C5-96B8-176A771B13BF}"/>
+                <a16:creationId xmlns:a16="http://schemas.microsoft.com/office/drawing/2014/main" id="{9FA9239A-45DC-4E88-83F0-BCC50AC5DBC5}"/>
               </a:ext>
             </a:extLst>
           </p:cNvPr>
@@ -10130,7 +10309,7 @@
           <p:cNvPr id="8" name="c3-text-47">
             <a:extLst xmlns:a="http://schemas.openxmlformats.org/drawingml/2006/main">
               <a:ext uri="{FF2B5EF4-FFF2-40B4-BE49-F238E27FC236}">
-                <a16:creationId xmlns:a16="http://schemas.microsoft.com/office/drawing/2014/main" id="{3A62F4AB-3A64-4F50-A599-C5856C2C8AC9}"/>
+                <a16:creationId xmlns:a16="http://schemas.microsoft.com/office/drawing/2014/main" id="{945647AB-F22F-4DA0-B8B8-9DDFBAC8B77C}"/>
               </a:ext>
             </a:extLst>
           </p:cNvPr>
@@ -10187,7 +10366,7 @@
           <p:cNvPr id="9" name="c3-shape-48">
             <a:extLst xmlns:a="http://schemas.openxmlformats.org/drawingml/2006/main">
               <a:ext uri="{FF2B5EF4-FFF2-40B4-BE49-F238E27FC236}">
-                <a16:creationId xmlns:a16="http://schemas.microsoft.com/office/drawing/2014/main" id="{FFBA4214-620B-4D9A-AEC5-7698E1D07B35}"/>
+                <a16:creationId xmlns:a16="http://schemas.microsoft.com/office/drawing/2014/main" id="{09256016-60D6-4C05-A1CC-02462B8AD497}"/>
               </a:ext>
             </a:extLst>
           </p:cNvPr>
@@ -10221,7 +10400,7 @@
           <p:cNvPr id="10" name="c3-text-49">
             <a:extLst xmlns:a="http://schemas.openxmlformats.org/drawingml/2006/main">
               <a:ext uri="{FF2B5EF4-FFF2-40B4-BE49-F238E27FC236}">
-                <a16:creationId xmlns:a16="http://schemas.microsoft.com/office/drawing/2014/main" id="{B1C05910-AE69-4868-92CF-02F7F19B890C}"/>
+                <a16:creationId xmlns:a16="http://schemas.microsoft.com/office/drawing/2014/main" id="{EEC0C97A-B517-46DC-9038-40EAC5AC13F7}"/>
               </a:ext>
             </a:extLst>
           </p:cNvPr>
@@ -10278,7 +10457,7 @@
           <p:cNvPr id="11" name="c3-shape-50">
             <a:extLst xmlns:a="http://schemas.openxmlformats.org/drawingml/2006/main">
               <a:ext uri="{FF2B5EF4-FFF2-40B4-BE49-F238E27FC236}">
-                <a16:creationId xmlns:a16="http://schemas.microsoft.com/office/drawing/2014/main" id="{2181918B-D9CB-4477-A8FA-48C2702C95BB}"/>
+                <a16:creationId xmlns:a16="http://schemas.microsoft.com/office/drawing/2014/main" id="{0A562966-8E1D-4865-AB5E-9365BC7F6094}"/>
               </a:ext>
             </a:extLst>
           </p:cNvPr>
@@ -10310,7 +10489,7 @@
           <p:cNvPr id="12" name="c3-shape-51">
             <a:extLst xmlns:a="http://schemas.openxmlformats.org/drawingml/2006/main">
               <a:ext uri="{FF2B5EF4-FFF2-40B4-BE49-F238E27FC236}">
-                <a16:creationId xmlns:a16="http://schemas.microsoft.com/office/drawing/2014/main" id="{45716F7C-22D3-452D-BF92-B7DA4ADC62B4}"/>
+                <a16:creationId xmlns:a16="http://schemas.microsoft.com/office/drawing/2014/main" id="{FD895B43-84CA-428F-8EBD-DC5206EAAD75}"/>
               </a:ext>
             </a:extLst>
           </p:cNvPr>
@@ -10344,7 +10523,7 @@
           <p:cNvPr id="13" name="c3-text-52">
             <a:extLst xmlns:a="http://schemas.openxmlformats.org/drawingml/2006/main">
               <a:ext uri="{FF2B5EF4-FFF2-40B4-BE49-F238E27FC236}">
-                <a16:creationId xmlns:a16="http://schemas.microsoft.com/office/drawing/2014/main" id="{75FA5F98-5285-4718-A147-C74EC58FF93F}"/>
+                <a16:creationId xmlns:a16="http://schemas.microsoft.com/office/drawing/2014/main" id="{A64034A9-F65D-45C5-956E-7C9C71E1B729}"/>
               </a:ext>
             </a:extLst>
           </p:cNvPr>
@@ -10401,7 +10580,7 @@
           <p:cNvPr id="14" name="c3-text-53">
             <a:extLst xmlns:a="http://schemas.openxmlformats.org/drawingml/2006/main">
               <a:ext uri="{FF2B5EF4-FFF2-40B4-BE49-F238E27FC236}">
-                <a16:creationId xmlns:a16="http://schemas.microsoft.com/office/drawing/2014/main" id="{D65FFCD3-B1E3-4E16-A317-64D9BC673A89}"/>
+                <a16:creationId xmlns:a16="http://schemas.microsoft.com/office/drawing/2014/main" id="{33B37409-A933-4F9C-AF1D-B9EF24C5D921}"/>
               </a:ext>
             </a:extLst>
           </p:cNvPr>
@@ -10448,7 +10627,7 @@
                 <a:ea typeface="Calibri"/>
                 <a:cs typeface="Calibri"/>
               </a:rPr>
-              <a:t>Each invoke starts from an empty state.</a:t>
+              <a:t>Earlier calls are not restored.</a:t>
             </a:r>
           </a:p>
         </p:txBody>
@@ -10456,10 +10635,10 @@
       <p:sp>
         <p:nvSpPr>
           <p:cNvPr id="15" name="c3-text-54">
-            <a:hlinkClick xmlns:r="http://schemas.openxmlformats.org/officeDocument/2006/relationships" xmlns:a="http://schemas.openxmlformats.org/drawingml/2006/main" r:id="Rf2fc100429f540ec"/>
-            <a:extLst xmlns:a="http://schemas.openxmlformats.org/drawingml/2006/main">
-              <a:ext uri="{FF2B5EF4-FFF2-40B4-BE49-F238E27FC236}">
-                <a16:creationId xmlns:a16="http://schemas.microsoft.com/office/drawing/2014/main" id="{BB2AF7FA-F8FD-4C0A-B2E4-200B7F06005F}"/>
+            <a:hlinkClick xmlns:r="http://schemas.openxmlformats.org/officeDocument/2006/relationships" xmlns:a="http://schemas.openxmlformats.org/drawingml/2006/main" r:id="Re8abe4b40f294f44"/>
+            <a:extLst xmlns:a="http://schemas.openxmlformats.org/drawingml/2006/main">
+              <a:ext uri="{FF2B5EF4-FFF2-40B4-BE49-F238E27FC236}">
+                <a16:creationId xmlns:a16="http://schemas.microsoft.com/office/drawing/2014/main" id="{5705ABE0-F4BC-4B16-A3BE-7A145CCAA96B}"/>
               </a:ext>
             </a:extLst>
           </p:cNvPr>
@@ -10516,7 +10695,7 @@
           <p:cNvPr id="16" name="c3-text-156">
             <a:extLst xmlns:a="http://schemas.openxmlformats.org/drawingml/2006/main">
               <a:ext uri="{FF2B5EF4-FFF2-40B4-BE49-F238E27FC236}">
-                <a16:creationId xmlns:a16="http://schemas.microsoft.com/office/drawing/2014/main" id="{B75DE0B0-DD79-4CE5-A0C0-8BC6D03D678C}"/>
+                <a16:creationId xmlns:a16="http://schemas.microsoft.com/office/drawing/2014/main" id="{9155AF79-6A2F-42BC-BD50-9221FD9FDC7E}"/>
               </a:ext>
             </a:extLst>
           </p:cNvPr>
@@ -10571,7 +10750,7 @@
     </p:spTree>
     <p:extLst>
       <p:ext uri="{BB962C8B-B14F-4D97-AF65-F5344CB8AC3E}">
-        <p14:creationId xmlns:p14="http://schemas.microsoft.com/office/powerpoint/2010/main" val="97081660"/>
+        <p14:creationId xmlns:p14="http://schemas.microsoft.com/office/powerpoint/2010/main" val="1057711700"/>
       </p:ext>
     </p:extLst>
   </p:cSld>
@@ -10602,7 +10781,7 @@
           <p:cNvPr id="15" name="c3-text-55">
             <a:extLst xmlns:a="http://schemas.openxmlformats.org/drawingml/2006/main">
               <a:ext uri="{FF2B5EF4-FFF2-40B4-BE49-F238E27FC236}">
-                <a16:creationId xmlns:a16="http://schemas.microsoft.com/office/drawing/2014/main" id="{AB4CA1CE-428C-4F4E-B358-D15EB8A932A1}"/>
+                <a16:creationId xmlns:a16="http://schemas.microsoft.com/office/drawing/2014/main" id="{34D2C4BC-D903-45E9-8F81-B812B8A68CA8}"/>
               </a:ext>
             </a:extLst>
           </p:cNvPr>
@@ -10659,7 +10838,7 @@
           <p:cNvPr id="2" name="c3-text-56">
             <a:extLst xmlns:a="http://schemas.openxmlformats.org/drawingml/2006/main">
               <a:ext uri="{FF2B5EF4-FFF2-40B4-BE49-F238E27FC236}">
-                <a16:creationId xmlns:a16="http://schemas.microsoft.com/office/drawing/2014/main" id="{97FE6301-FE9F-4770-B37A-41F4FD630339}"/>
+                <a16:creationId xmlns:a16="http://schemas.microsoft.com/office/drawing/2014/main" id="{8A23756A-7F8B-4641-91C2-B7D1610F0251}"/>
               </a:ext>
             </a:extLst>
           </p:cNvPr>
@@ -10716,7 +10895,7 @@
           <p:cNvPr id="3" name="c3-text-57">
             <a:extLst xmlns:a="http://schemas.openxmlformats.org/drawingml/2006/main">
               <a:ext uri="{FF2B5EF4-FFF2-40B4-BE49-F238E27FC236}">
-                <a16:creationId xmlns:a16="http://schemas.microsoft.com/office/drawing/2014/main" id="{D63D83F0-EB0D-482C-8EE6-3704183EDD2C}"/>
+                <a16:creationId xmlns:a16="http://schemas.microsoft.com/office/drawing/2014/main" id="{BFF94CAE-711F-4E29-8613-81B55714D180}"/>
               </a:ext>
             </a:extLst>
           </p:cNvPr>
@@ -10773,7 +10952,7 @@
           <p:cNvPr id="4" name="c3-shape-58">
             <a:extLst xmlns:a="http://schemas.openxmlformats.org/drawingml/2006/main">
               <a:ext uri="{FF2B5EF4-FFF2-40B4-BE49-F238E27FC236}">
-                <a16:creationId xmlns:a16="http://schemas.microsoft.com/office/drawing/2014/main" id="{37CE46C2-E9EF-4C06-9EF6-8BF7C038FA3F}"/>
+                <a16:creationId xmlns:a16="http://schemas.microsoft.com/office/drawing/2014/main" id="{2616B142-F391-4C12-BF35-18CABBF4B09F}"/>
               </a:ext>
             </a:extLst>
           </p:cNvPr>
@@ -10807,7 +10986,7 @@
           <p:cNvPr id="5" name="c3-shape-59">
             <a:extLst xmlns:a="http://schemas.openxmlformats.org/drawingml/2006/main">
               <a:ext uri="{FF2B5EF4-FFF2-40B4-BE49-F238E27FC236}">
-                <a16:creationId xmlns:a16="http://schemas.microsoft.com/office/drawing/2014/main" id="{67CEDFF5-D926-4DCC-912D-6AD238D25C6B}"/>
+                <a16:creationId xmlns:a16="http://schemas.microsoft.com/office/drawing/2014/main" id="{4AC1598D-5C2D-4452-A5A9-E88C5A6B2D4A}"/>
               </a:ext>
             </a:extLst>
           </p:cNvPr>
@@ -10839,7 +11018,7 @@
           <p:cNvPr id="6" name="c3-text-60">
             <a:extLst xmlns:a="http://schemas.openxmlformats.org/drawingml/2006/main">
               <a:ext uri="{FF2B5EF4-FFF2-40B4-BE49-F238E27FC236}">
-                <a16:creationId xmlns:a16="http://schemas.microsoft.com/office/drawing/2014/main" id="{A3A54031-7B07-4B00-9FA4-46F11BC8FF64}"/>
+                <a16:creationId xmlns:a16="http://schemas.microsoft.com/office/drawing/2014/main" id="{1F98470F-10BB-4F4C-89FC-CE2CACD75422}"/>
               </a:ext>
             </a:extLst>
           </p:cNvPr>
@@ -10896,7 +11075,7 @@
           <p:cNvPr id="7" name="c3-text-61">
             <a:extLst xmlns:a="http://schemas.openxmlformats.org/drawingml/2006/main">
               <a:ext uri="{FF2B5EF4-FFF2-40B4-BE49-F238E27FC236}">
-                <a16:creationId xmlns:a16="http://schemas.microsoft.com/office/drawing/2014/main" id="{F946BBEC-71F3-43FF-A808-AA09A780E11B}"/>
+                <a16:creationId xmlns:a16="http://schemas.microsoft.com/office/drawing/2014/main" id="{79351D79-B91B-41EA-B293-71282AD52075}"/>
               </a:ext>
             </a:extLst>
           </p:cNvPr>
@@ -10953,7 +11132,7 @@
           <p:cNvPr id="8" name="c3-shape-62">
             <a:extLst xmlns:a="http://schemas.openxmlformats.org/drawingml/2006/main">
               <a:ext uri="{FF2B5EF4-FFF2-40B4-BE49-F238E27FC236}">
-                <a16:creationId xmlns:a16="http://schemas.microsoft.com/office/drawing/2014/main" id="{0348CB5D-2586-4016-9067-404E8A2AA923}"/>
+                <a16:creationId xmlns:a16="http://schemas.microsoft.com/office/drawing/2014/main" id="{F43D65ED-0B0D-4025-8178-05485DB4ED19}"/>
               </a:ext>
             </a:extLst>
           </p:cNvPr>
@@ -10987,7 +11166,7 @@
           <p:cNvPr id="9" name="c3-shape-63">
             <a:extLst xmlns:a="http://schemas.openxmlformats.org/drawingml/2006/main">
               <a:ext uri="{FF2B5EF4-FFF2-40B4-BE49-F238E27FC236}">
-                <a16:creationId xmlns:a16="http://schemas.microsoft.com/office/drawing/2014/main" id="{BFEEA143-A210-4C17-912E-D09DA19D28BF}"/>
+                <a16:creationId xmlns:a16="http://schemas.microsoft.com/office/drawing/2014/main" id="{6C687A8F-6341-463F-88FB-E7FEF313F73B}"/>
               </a:ext>
             </a:extLst>
           </p:cNvPr>
@@ -11019,7 +11198,7 @@
           <p:cNvPr id="10" name="c3-text-64">
             <a:extLst xmlns:a="http://schemas.openxmlformats.org/drawingml/2006/main">
               <a:ext uri="{FF2B5EF4-FFF2-40B4-BE49-F238E27FC236}">
-                <a16:creationId xmlns:a16="http://schemas.microsoft.com/office/drawing/2014/main" id="{793DEF62-43ED-4B4C-BB10-06D64C92E0B1}"/>
+                <a16:creationId xmlns:a16="http://schemas.microsoft.com/office/drawing/2014/main" id="{E2C9EC91-AA6F-4F0C-A53B-9FFAFA2CDC86}"/>
               </a:ext>
             </a:extLst>
           </p:cNvPr>
@@ -11076,7 +11255,7 @@
           <p:cNvPr id="11" name="c3-text-65">
             <a:extLst xmlns:a="http://schemas.openxmlformats.org/drawingml/2006/main">
               <a:ext uri="{FF2B5EF4-FFF2-40B4-BE49-F238E27FC236}">
-                <a16:creationId xmlns:a16="http://schemas.microsoft.com/office/drawing/2014/main" id="{B36D301A-3CE9-4AE4-BF23-0A947D25CE01}"/>
+                <a16:creationId xmlns:a16="http://schemas.microsoft.com/office/drawing/2014/main" id="{CF63EED2-D3D8-4ACE-90CF-DC46F83CAD2F}"/>
               </a:ext>
             </a:extLst>
           </p:cNvPr>
@@ -11133,7 +11312,7 @@
           <p:cNvPr id="12" name="c3-shape-66">
             <a:extLst xmlns:a="http://schemas.openxmlformats.org/drawingml/2006/main">
               <a:ext uri="{FF2B5EF4-FFF2-40B4-BE49-F238E27FC236}">
-                <a16:creationId xmlns:a16="http://schemas.microsoft.com/office/drawing/2014/main" id="{B948C215-67C7-4478-B1D5-8484EEE397F4}"/>
+                <a16:creationId xmlns:a16="http://schemas.microsoft.com/office/drawing/2014/main" id="{B217611A-5476-46C2-8BD9-ED17700311C8}"/>
               </a:ext>
             </a:extLst>
           </p:cNvPr>
@@ -11167,7 +11346,7 @@
           <p:cNvPr id="13" name="c3-text-67">
             <a:extLst xmlns:a="http://schemas.openxmlformats.org/drawingml/2006/main">
               <a:ext uri="{FF2B5EF4-FFF2-40B4-BE49-F238E27FC236}">
-                <a16:creationId xmlns:a16="http://schemas.microsoft.com/office/drawing/2014/main" id="{06F8EBCE-CEC9-4372-B4A2-4E2ACB6D0665}"/>
+                <a16:creationId xmlns:a16="http://schemas.microsoft.com/office/drawing/2014/main" id="{4D558EA6-5E53-47FC-AAC1-937F51497DB9}"/>
               </a:ext>
             </a:extLst>
           </p:cNvPr>
@@ -11224,7 +11403,7 @@
           <p:cNvPr id="14" name="c3-text-157">
             <a:extLst xmlns:a="http://schemas.openxmlformats.org/drawingml/2006/main">
               <a:ext uri="{FF2B5EF4-FFF2-40B4-BE49-F238E27FC236}">
-                <a16:creationId xmlns:a16="http://schemas.microsoft.com/office/drawing/2014/main" id="{AE558A22-C6DB-4284-959A-045F8CB24636}"/>
+                <a16:creationId xmlns:a16="http://schemas.microsoft.com/office/drawing/2014/main" id="{F6D0F887-D588-49CE-9ED8-977DF473E34B}"/>
               </a:ext>
             </a:extLst>
           </p:cNvPr>
@@ -11279,7 +11458,7 @@
     </p:spTree>
     <p:extLst>
       <p:ext uri="{BB962C8B-B14F-4D97-AF65-F5344CB8AC3E}">
-        <p14:creationId xmlns:p14="http://schemas.microsoft.com/office/powerpoint/2010/main" val="742848872"/>
+        <p14:creationId xmlns:p14="http://schemas.microsoft.com/office/powerpoint/2010/main" val="159547992"/>
       </p:ext>
     </p:extLst>
   </p:cSld>
@@ -11310,7 +11489,7 @@
           <p:cNvPr id="9" name="c3-text-68">
             <a:extLst xmlns:a="http://schemas.openxmlformats.org/drawingml/2006/main">
               <a:ext uri="{FF2B5EF4-FFF2-40B4-BE49-F238E27FC236}">
-                <a16:creationId xmlns:a16="http://schemas.microsoft.com/office/drawing/2014/main" id="{104FEE84-A5B3-4777-96CA-54AAF741A8FD}"/>
+                <a16:creationId xmlns:a16="http://schemas.microsoft.com/office/drawing/2014/main" id="{08953C11-B8A9-416B-B833-010EE7AB28AF}"/>
               </a:ext>
             </a:extLst>
           </p:cNvPr>
@@ -11367,7 +11546,7 @@
           <p:cNvPr id="2" name="c3-text-69">
             <a:extLst xmlns:a="http://schemas.openxmlformats.org/drawingml/2006/main">
               <a:ext uri="{FF2B5EF4-FFF2-40B4-BE49-F238E27FC236}">
-                <a16:creationId xmlns:a16="http://schemas.microsoft.com/office/drawing/2014/main" id="{C290820B-1289-4C54-845B-8A7942B34972}"/>
+                <a16:creationId xmlns:a16="http://schemas.microsoft.com/office/drawing/2014/main" id="{C6B5ED88-E472-4B41-AFF7-081F4968FF85}"/>
               </a:ext>
             </a:extLst>
           </p:cNvPr>
@@ -11424,7 +11603,7 @@
           <p:cNvPr id="3" name="c3-text-70">
             <a:extLst xmlns:a="http://schemas.openxmlformats.org/drawingml/2006/main">
               <a:ext uri="{FF2B5EF4-FFF2-40B4-BE49-F238E27FC236}">
-                <a16:creationId xmlns:a16="http://schemas.microsoft.com/office/drawing/2014/main" id="{6FC4879E-5392-47D6-81CB-3D457FFCB2FE}"/>
+                <a16:creationId xmlns:a16="http://schemas.microsoft.com/office/drawing/2014/main" id="{EFB5ECC7-E0EF-402A-AD8B-598704D0A57C}"/>
               </a:ext>
             </a:extLst>
           </p:cNvPr>
@@ -11481,7 +11660,7 @@
           <p:cNvPr id="4" name="c3-shape-71">
             <a:extLst xmlns:a="http://schemas.openxmlformats.org/drawingml/2006/main">
               <a:ext uri="{FF2B5EF4-FFF2-40B4-BE49-F238E27FC236}">
-                <a16:creationId xmlns:a16="http://schemas.microsoft.com/office/drawing/2014/main" id="{0F1B5BE4-0108-49E0-BC0B-0A86829C77F4}"/>
+                <a16:creationId xmlns:a16="http://schemas.microsoft.com/office/drawing/2014/main" id="{7EEE2C1C-82BD-42F4-B4E2-0FD6E1BA4C42}"/>
               </a:ext>
             </a:extLst>
           </p:cNvPr>
@@ -11515,7 +11694,7 @@
           <p:cNvPr id="5" name="c3-text-72">
             <a:extLst xmlns:a="http://schemas.openxmlformats.org/drawingml/2006/main">
               <a:ext uri="{FF2B5EF4-FFF2-40B4-BE49-F238E27FC236}">
-                <a16:creationId xmlns:a16="http://schemas.microsoft.com/office/drawing/2014/main" id="{EB5AC28E-928B-4042-89EA-1973CA1EF0A6}"/>
+                <a16:creationId xmlns:a16="http://schemas.microsoft.com/office/drawing/2014/main" id="{F644F1B4-978E-49A1-9855-08345A1BAF22}"/>
               </a:ext>
             </a:extLst>
           </p:cNvPr>
@@ -12016,7 +12195,7 @@
           <p:cNvPr id="6" name="c3-shape-73">
             <a:extLst xmlns:a="http://schemas.openxmlformats.org/drawingml/2006/main">
               <a:ext uri="{FF2B5EF4-FFF2-40B4-BE49-F238E27FC236}">
-                <a16:creationId xmlns:a16="http://schemas.microsoft.com/office/drawing/2014/main" id="{53810E3C-BA6A-424A-8A1B-4F7DB4B5949E}"/>
+                <a16:creationId xmlns:a16="http://schemas.microsoft.com/office/drawing/2014/main" id="{8BAF5F58-3A4B-483E-B3D9-1EB624295B32}"/>
               </a:ext>
             </a:extLst>
           </p:cNvPr>
@@ -12050,7 +12229,7 @@
           <p:cNvPr id="7" name="c3-text-74">
             <a:extLst xmlns:a="http://schemas.openxmlformats.org/drawingml/2006/main">
               <a:ext uri="{FF2B5EF4-FFF2-40B4-BE49-F238E27FC236}">
-                <a16:creationId xmlns:a16="http://schemas.microsoft.com/office/drawing/2014/main" id="{E53F4012-5C41-49A2-BF39-0540D88B3A45}"/>
+                <a16:creationId xmlns:a16="http://schemas.microsoft.com/office/drawing/2014/main" id="{BBB47149-4D31-4729-9240-6728899F48DD}"/>
               </a:ext>
             </a:extLst>
           </p:cNvPr>
@@ -12107,7 +12286,7 @@
           <p:cNvPr id="8" name="c3-text-158">
             <a:extLst xmlns:a="http://schemas.openxmlformats.org/drawingml/2006/main">
               <a:ext uri="{FF2B5EF4-FFF2-40B4-BE49-F238E27FC236}">
-                <a16:creationId xmlns:a16="http://schemas.microsoft.com/office/drawing/2014/main" id="{C736D144-4127-4AAC-AF11-F34A476727F6}"/>
+                <a16:creationId xmlns:a16="http://schemas.microsoft.com/office/drawing/2014/main" id="{196E0006-03C4-4E55-913B-21EBD369B7E2}"/>
               </a:ext>
             </a:extLst>
           </p:cNvPr>
@@ -12162,7 +12341,7 @@
     </p:spTree>
     <p:extLst>
       <p:ext uri="{BB962C8B-B14F-4D97-AF65-F5344CB8AC3E}">
-        <p14:creationId xmlns:p14="http://schemas.microsoft.com/office/powerpoint/2010/main" val="145897794"/>
+        <p14:creationId xmlns:p14="http://schemas.microsoft.com/office/powerpoint/2010/main" val="1549091797"/>
       </p:ext>
     </p:extLst>
   </p:cSld>
@@ -12193,7 +12372,7 @@
           <p:cNvPr id="15" name="c3-text-75">
             <a:extLst xmlns:a="http://schemas.openxmlformats.org/drawingml/2006/main">
               <a:ext uri="{FF2B5EF4-FFF2-40B4-BE49-F238E27FC236}">
-                <a16:creationId xmlns:a16="http://schemas.microsoft.com/office/drawing/2014/main" id="{FDB9815A-E427-49E3-BF31-F89D5047CB84}"/>
+                <a16:creationId xmlns:a16="http://schemas.microsoft.com/office/drawing/2014/main" id="{07905631-4734-43CB-BEE8-BE061A8C4351}"/>
               </a:ext>
             </a:extLst>
           </p:cNvPr>
@@ -12250,7 +12429,7 @@
           <p:cNvPr id="2" name="c3-text-76">
             <a:extLst xmlns:a="http://schemas.openxmlformats.org/drawingml/2006/main">
               <a:ext uri="{FF2B5EF4-FFF2-40B4-BE49-F238E27FC236}">
-                <a16:creationId xmlns:a16="http://schemas.microsoft.com/office/drawing/2014/main" id="{9C96CAE4-7F00-4716-894C-0720913BD051}"/>
+                <a16:creationId xmlns:a16="http://schemas.microsoft.com/office/drawing/2014/main" id="{1942C45E-81B0-4E4C-B04B-B5AA5D0213D6}"/>
               </a:ext>
             </a:extLst>
           </p:cNvPr>
@@ -12307,7 +12486,7 @@
           <p:cNvPr id="3" name="c3-text-77">
             <a:extLst xmlns:a="http://schemas.openxmlformats.org/drawingml/2006/main">
               <a:ext uri="{FF2B5EF4-FFF2-40B4-BE49-F238E27FC236}">
-                <a16:creationId xmlns:a16="http://schemas.microsoft.com/office/drawing/2014/main" id="{1C24C84D-A63F-472F-BEE2-5D736CC025E2}"/>
+                <a16:creationId xmlns:a16="http://schemas.microsoft.com/office/drawing/2014/main" id="{0373E94F-FD5A-486B-B141-0C1953DDA820}"/>
               </a:ext>
             </a:extLst>
           </p:cNvPr>
@@ -12364,7 +12543,7 @@
           <p:cNvPr id="4" name="c3-shape-78">
             <a:extLst xmlns:a="http://schemas.openxmlformats.org/drawingml/2006/main">
               <a:ext uri="{FF2B5EF4-FFF2-40B4-BE49-F238E27FC236}">
-                <a16:creationId xmlns:a16="http://schemas.microsoft.com/office/drawing/2014/main" id="{772E0486-B8E8-410B-92AD-96E58D3F0A51}"/>
+                <a16:creationId xmlns:a16="http://schemas.microsoft.com/office/drawing/2014/main" id="{CB1ECFAF-EADF-460E-95B9-0D8570FE1FCC}"/>
               </a:ext>
             </a:extLst>
           </p:cNvPr>
@@ -12398,7 +12577,7 @@
           <p:cNvPr id="5" name="c3-shape-79">
             <a:extLst xmlns:a="http://schemas.openxmlformats.org/drawingml/2006/main">
               <a:ext uri="{FF2B5EF4-FFF2-40B4-BE49-F238E27FC236}">
-                <a16:creationId xmlns:a16="http://schemas.microsoft.com/office/drawing/2014/main" id="{F61119E9-3682-498D-A1F1-0251880DF894}"/>
+                <a16:creationId xmlns:a16="http://schemas.microsoft.com/office/drawing/2014/main" id="{EBA18722-5C10-4A99-A8F7-3E184F993BDF}"/>
               </a:ext>
             </a:extLst>
           </p:cNvPr>
@@ -12430,7 +12609,7 @@
           <p:cNvPr id="6" name="c3-text-80">
             <a:extLst xmlns:a="http://schemas.openxmlformats.org/drawingml/2006/main">
               <a:ext uri="{FF2B5EF4-FFF2-40B4-BE49-F238E27FC236}">
-                <a16:creationId xmlns:a16="http://schemas.microsoft.com/office/drawing/2014/main" id="{7B15039E-B49F-42B0-B2FC-C7D50C2BD2CB}"/>
+                <a16:creationId xmlns:a16="http://schemas.microsoft.com/office/drawing/2014/main" id="{4EC1CB05-4621-40CE-86E8-F665B7E50421}"/>
               </a:ext>
             </a:extLst>
           </p:cNvPr>
@@ -12487,7 +12666,7 @@
           <p:cNvPr id="7" name="c3-text-81">
             <a:extLst xmlns:a="http://schemas.openxmlformats.org/drawingml/2006/main">
               <a:ext uri="{FF2B5EF4-FFF2-40B4-BE49-F238E27FC236}">
-                <a16:creationId xmlns:a16="http://schemas.microsoft.com/office/drawing/2014/main" id="{C0AEDE4F-AEFE-4CA8-A0D0-94E5A829C363}"/>
+                <a16:creationId xmlns:a16="http://schemas.microsoft.com/office/drawing/2014/main" id="{AC87CFFE-9397-413C-9D7A-AADB3DAD13E6}"/>
               </a:ext>
             </a:extLst>
           </p:cNvPr>
@@ -12567,7 +12746,7 @@
           <p:cNvPr id="8" name="c3-shape-82">
             <a:extLst xmlns:a="http://schemas.openxmlformats.org/drawingml/2006/main">
               <a:ext uri="{FF2B5EF4-FFF2-40B4-BE49-F238E27FC236}">
-                <a16:creationId xmlns:a16="http://schemas.microsoft.com/office/drawing/2014/main" id="{120DB8C6-B5C4-4904-BEEE-A6904794F4BD}"/>
+                <a16:creationId xmlns:a16="http://schemas.microsoft.com/office/drawing/2014/main" id="{5CF67450-1D5B-4396-ACDE-6D40E7089725}"/>
               </a:ext>
             </a:extLst>
           </p:cNvPr>
@@ -12601,7 +12780,7 @@
           <p:cNvPr id="9" name="c3-shape-83">
             <a:extLst xmlns:a="http://schemas.openxmlformats.org/drawingml/2006/main">
               <a:ext uri="{FF2B5EF4-FFF2-40B4-BE49-F238E27FC236}">
-                <a16:creationId xmlns:a16="http://schemas.microsoft.com/office/drawing/2014/main" id="{19FF4420-5F93-4854-A5F0-AE7FC75E7B82}"/>
+                <a16:creationId xmlns:a16="http://schemas.microsoft.com/office/drawing/2014/main" id="{B3C88C70-A755-4C94-A7A4-862D108619E4}"/>
               </a:ext>
             </a:extLst>
           </p:cNvPr>
@@ -12633,7 +12812,7 @@
           <p:cNvPr id="10" name="c3-text-84">
             <a:extLst xmlns:a="http://schemas.openxmlformats.org/drawingml/2006/main">
               <a:ext uri="{FF2B5EF4-FFF2-40B4-BE49-F238E27FC236}">
-                <a16:creationId xmlns:a16="http://schemas.microsoft.com/office/drawing/2014/main" id="{6FFC7720-F058-4811-9111-3890D1EC678F}"/>
+                <a16:creationId xmlns:a16="http://schemas.microsoft.com/office/drawing/2014/main" id="{90251F20-3A8E-4F7A-9710-3DBF8BAD68DD}"/>
               </a:ext>
             </a:extLst>
           </p:cNvPr>
@@ -12690,7 +12869,7 @@
           <p:cNvPr id="11" name="c3-text-85">
             <a:extLst xmlns:a="http://schemas.openxmlformats.org/drawingml/2006/main">
               <a:ext uri="{FF2B5EF4-FFF2-40B4-BE49-F238E27FC236}">
-                <a16:creationId xmlns:a16="http://schemas.microsoft.com/office/drawing/2014/main" id="{AE360303-F546-4D91-BFB9-A4952DE34856}"/>
+                <a16:creationId xmlns:a16="http://schemas.microsoft.com/office/drawing/2014/main" id="{7D19AA9E-632A-44DB-9AF1-E54C1CC1A65B}"/>
               </a:ext>
             </a:extLst>
           </p:cNvPr>
@@ -12747,7 +12926,7 @@
           <p:cNvPr id="12" name="c3-text-86">
             <a:extLst xmlns:a="http://schemas.openxmlformats.org/drawingml/2006/main">
               <a:ext uri="{FF2B5EF4-FFF2-40B4-BE49-F238E27FC236}">
-                <a16:creationId xmlns:a16="http://schemas.microsoft.com/office/drawing/2014/main" id="{A4507712-6FF4-47D3-84F8-3D1352003EF3}"/>
+                <a16:creationId xmlns:a16="http://schemas.microsoft.com/office/drawing/2014/main" id="{D83250C3-C8A0-442E-8A16-90170938705A}"/>
               </a:ext>
             </a:extLst>
           </p:cNvPr>
@@ -12802,10 +12981,10 @@
       <p:sp>
         <p:nvSpPr>
           <p:cNvPr id="13" name="c3-text-87">
-            <a:hlinkClick xmlns:r="http://schemas.openxmlformats.org/officeDocument/2006/relationships" xmlns:a="http://schemas.openxmlformats.org/drawingml/2006/main" r:id="Rbe7b2dd652954337"/>
-            <a:extLst xmlns:a="http://schemas.openxmlformats.org/drawingml/2006/main">
-              <a:ext uri="{FF2B5EF4-FFF2-40B4-BE49-F238E27FC236}">
-                <a16:creationId xmlns:a16="http://schemas.microsoft.com/office/drawing/2014/main" id="{5FF54C4D-4B5B-4BB5-A5AB-8595551F3CA0}"/>
+            <a:hlinkClick xmlns:r="http://schemas.openxmlformats.org/officeDocument/2006/relationships" xmlns:a="http://schemas.openxmlformats.org/drawingml/2006/main" r:id="Red1269773ab04dac"/>
+            <a:extLst xmlns:a="http://schemas.openxmlformats.org/drawingml/2006/main">
+              <a:ext uri="{FF2B5EF4-FFF2-40B4-BE49-F238E27FC236}">
+                <a16:creationId xmlns:a16="http://schemas.microsoft.com/office/drawing/2014/main" id="{97A15024-8C4C-4C88-89C0-587140BA3C99}"/>
               </a:ext>
             </a:extLst>
           </p:cNvPr>
@@ -12862,7 +13041,7 @@
           <p:cNvPr id="14" name="c3-text-159">
             <a:extLst xmlns:a="http://schemas.openxmlformats.org/drawingml/2006/main">
               <a:ext uri="{FF2B5EF4-FFF2-40B4-BE49-F238E27FC236}">
-                <a16:creationId xmlns:a16="http://schemas.microsoft.com/office/drawing/2014/main" id="{6C044B75-7D7C-4F6A-AEF3-633598438E64}"/>
+                <a16:creationId xmlns:a16="http://schemas.microsoft.com/office/drawing/2014/main" id="{2DED986B-0835-43D7-8E22-34DF74326EAE}"/>
               </a:ext>
             </a:extLst>
           </p:cNvPr>
@@ -12917,7 +13096,7 @@
     </p:spTree>
     <p:extLst>
       <p:ext uri="{BB962C8B-B14F-4D97-AF65-F5344CB8AC3E}">
-        <p14:creationId xmlns:p14="http://schemas.microsoft.com/office/powerpoint/2010/main" val="199889502"/>
+        <p14:creationId xmlns:p14="http://schemas.microsoft.com/office/powerpoint/2010/main" val="2066874460"/>
       </p:ext>
     </p:extLst>
   </p:cSld>
